--- a/Lecture Slides/11 - Static Libraries and Relocation Techniques.pptx
+++ b/Lecture Slides/11 - Static Libraries and Relocation Techniques.pptx
@@ -154,7 +154,7 @@
           <a:p>
             <a:fld id="{1C63B73A-DBAC-4CA0-B0DA-9A4B6CFE0DFE}" type="datetimeFigureOut">
               <a:rPr lang="en-US" smtClean="0"/>
-              <a:t>2/17/2026</a:t>
+              <a:t>2/20/2026</a:t>
             </a:fld>
             <a:endParaRPr lang="en-US"/>
           </a:p>
@@ -558,6 +558,87 @@
               <a:t>Static Library directory</a:t>
             </a:r>
           </a:p>
+          <a:p>
+            <a:endParaRPr lang="en-US" dirty="0"/>
+          </a:p>
+          <a:p>
+            <a:r>
+              <a:rPr lang="en-US" b="1" dirty="0"/>
+              <a:t>Compilation</a:t>
+            </a:r>
+            <a:r>
+              <a:rPr lang="en-US" dirty="0"/>
+              <a:t>: </a:t>
+            </a:r>
+          </a:p>
+          <a:p>
+            <a:r>
+              <a:rPr lang="en-US" dirty="0"/>
+              <a:t>Use </a:t>
+            </a:r>
+            <a:r>
+              <a:rPr lang="en-US" sz="1200" kern="1200" dirty="0" err="1">
+                <a:solidFill>
+                  <a:schemeClr val="tx1"/>
+                </a:solidFill>
+                <a:latin typeface="+mn-lt"/>
+                <a:ea typeface="+mn-ea"/>
+                <a:cs typeface="+mn-cs"/>
+              </a:rPr>
+              <a:t>gcc</a:t>
+            </a:r>
+            <a:r>
+              <a:rPr lang="en-US" sz="1200" kern="1200" dirty="0">
+                <a:solidFill>
+                  <a:schemeClr val="tx1"/>
+                </a:solidFill>
+                <a:latin typeface="+mn-lt"/>
+                <a:ea typeface="+mn-ea"/>
+                <a:cs typeface="+mn-cs"/>
+              </a:rPr>
+              <a:t> -c </a:t>
+            </a:r>
+            <a:r>
+              <a:rPr lang="en-US" sz="1200" kern="1200" dirty="0" err="1">
+                <a:solidFill>
+                  <a:schemeClr val="tx1"/>
+                </a:solidFill>
+                <a:latin typeface="+mn-lt"/>
+                <a:ea typeface="+mn-ea"/>
+                <a:cs typeface="+mn-cs"/>
+              </a:rPr>
+              <a:t>math_operations.c</a:t>
+            </a:r>
+            <a:r>
+              <a:rPr lang="en-US" sz="1200" kern="1200" dirty="0">
+                <a:solidFill>
+                  <a:schemeClr val="tx1"/>
+                </a:solidFill>
+                <a:latin typeface="+mn-lt"/>
+                <a:ea typeface="+mn-ea"/>
+                <a:cs typeface="+mn-cs"/>
+              </a:rPr>
+              <a:t> </a:t>
+            </a:r>
+            <a:r>
+              <a:rPr lang="en-US" sz="1200" kern="1200" dirty="0" err="1">
+                <a:solidFill>
+                  <a:schemeClr val="tx1"/>
+                </a:solidFill>
+                <a:latin typeface="+mn-lt"/>
+                <a:ea typeface="+mn-ea"/>
+                <a:cs typeface="+mn-cs"/>
+              </a:rPr>
+              <a:t>string_operations.c</a:t>
+            </a:r>
+            <a:r>
+              <a:rPr lang="en-US" dirty="0"/>
+              <a:t> to create object files.</a:t>
+            </a:r>
+          </a:p>
+          <a:p>
+            <a:endParaRPr lang="en-US" dirty="0"/>
+          </a:p>
         </p:txBody>
       </p:sp>
       <p:sp>
@@ -640,23 +721,6 @@
           <a:bodyPr/>
           <a:lstStyle/>
           <a:p>
-            <a:r>
-              <a:rPr lang="en-US" sz="1200" b="1" kern="1200" dirty="0">
-                <a:solidFill>
-                  <a:schemeClr val="tx1"/>
-                </a:solidFill>
-                <a:latin typeface="+mn-lt"/>
-                <a:ea typeface="+mn-ea"/>
-                <a:cs typeface="+mn-cs"/>
-              </a:rPr>
-              <a:t>nm</a:t>
-            </a:r>
-            <a:r>
-              <a:rPr lang="en-US" dirty="0"/>
-              <a:t>: Shows symbol types and addresses.</a:t>
-            </a:r>
-          </a:p>
-          <a:p>
             <a:endParaRPr lang="en-US" dirty="0"/>
           </a:p>
         </p:txBody>
@@ -678,7 +742,7 @@
           <a:p>
             <a:fld id="{3C11C18F-566C-4A85-8022-99BE34D7F2A5}" type="slidenum">
               <a:rPr lang="en-US" smtClean="0"/>
-              <a:t>17</a:t>
+              <a:t>13</a:t>
             </a:fld>
             <a:endParaRPr lang="en-US"/>
           </a:p>
@@ -687,7 +751,7 @@
     </p:spTree>
     <p:extLst>
       <p:ext uri="{BB962C8B-B14F-4D97-AF65-F5344CB8AC3E}">
-        <p14:creationId xmlns:p14="http://schemas.microsoft.com/office/powerpoint/2010/main" val="1578416762"/>
+        <p14:creationId xmlns:p14="http://schemas.microsoft.com/office/powerpoint/2010/main" val="2946514717"/>
       </p:ext>
     </p:extLst>
   </p:cSld>
@@ -742,8 +806,14 @@
           <a:lstStyle/>
           <a:p>
             <a:r>
+              <a:rPr lang="en-US" b="1" dirty="0"/>
+              <a:t>Figure:</a:t>
+            </a:r>
+          </a:p>
+          <a:p>
+            <a:r>
               <a:rPr lang="en-US" dirty="0"/>
-              <a:t>A terminal output of a symbol table with various flags (D, T, U) indicating the status of symbols like </a:t>
+              <a:t>A terminal output of a symbol table for a linked executable where </a:t>
             </a:r>
             <a:r>
               <a:rPr lang="en-US" sz="1200" kern="1200" dirty="0">
@@ -765,11 +835,11 @@
                 <a:ea typeface="+mn-ea"/>
                 <a:cs typeface="+mn-cs"/>
               </a:rPr>
-              <a:t>global_var</a:t>
+              <a:t>print_message</a:t>
             </a:r>
             <a:r>
               <a:rPr lang="en-US" dirty="0"/>
-              <a:t>, </a:t>
+              <a:t> now has a specific memory address and </a:t>
             </a:r>
             <a:r>
               <a:rPr lang="en-US" sz="1200" kern="1200" dirty="0">
@@ -780,14 +850,10 @@
                 <a:ea typeface="+mn-ea"/>
                 <a:cs typeface="+mn-cs"/>
               </a:rPr>
-              <a:t>_main</a:t>
-            </a:r>
-            <a:r>
-              <a:rPr lang="en-US" dirty="0"/>
-              <a:t>, and the undefined </a:t>
-            </a:r>
-            <a:r>
-              <a:rPr lang="en-US" sz="1200" kern="1200" dirty="0">
+              <a:t>_</a:t>
+            </a:r>
+            <a:r>
+              <a:rPr lang="en-US" sz="1200" kern="1200" dirty="0" err="1">
                 <a:solidFill>
                   <a:schemeClr val="tx1"/>
                 </a:solidFill>
@@ -795,10 +861,14 @@
                 <a:ea typeface="+mn-ea"/>
                 <a:cs typeface="+mn-cs"/>
               </a:rPr>
-              <a:t>_</a:t>
-            </a:r>
-            <a:r>
-              <a:rPr lang="en-US" sz="1200" kern="1200" dirty="0" err="1">
+              <a:t>printf</a:t>
+            </a:r>
+            <a:r>
+              <a:rPr lang="en-US" dirty="0"/>
+              <a:t> is marked as undefined (</a:t>
+            </a:r>
+            <a:r>
+              <a:rPr lang="en-US" sz="1200" kern="1200" dirty="0">
                 <a:solidFill>
                   <a:schemeClr val="tx1"/>
                 </a:solidFill>
@@ -806,11 +876,11 @@
                 <a:ea typeface="+mn-ea"/>
                 <a:cs typeface="+mn-cs"/>
               </a:rPr>
-              <a:t>printf</a:t>
+              <a:t>*UND*</a:t>
             </a:r>
             <a:r>
               <a:rPr lang="en-US" dirty="0"/>
-              <a:t>.</a:t>
+              <a:t>).</a:t>
             </a:r>
           </a:p>
           <a:p>
@@ -835,7 +905,7 @@
           <a:p>
             <a:fld id="{3C11C18F-566C-4A85-8022-99BE34D7F2A5}" type="slidenum">
               <a:rPr lang="en-US" smtClean="0"/>
-              <a:t>18</a:t>
+              <a:t>15</a:t>
             </a:fld>
             <a:endParaRPr lang="en-US"/>
           </a:p>
@@ -844,7 +914,7 @@
     </p:spTree>
     <p:extLst>
       <p:ext uri="{BB962C8B-B14F-4D97-AF65-F5344CB8AC3E}">
-        <p14:creationId xmlns:p14="http://schemas.microsoft.com/office/powerpoint/2010/main" val="3056962291"/>
+        <p14:creationId xmlns:p14="http://schemas.microsoft.com/office/powerpoint/2010/main" val="3957322862"/>
       </p:ext>
     </p:extLst>
   </p:cSld>
@@ -855,111 +925,6 @@
 </file>
 
 <file path=ppt/notesSlides/notesSlide12.xml><?xml version="1.0" encoding="utf-8"?>
-<p:notes xmlns:a="http://schemas.openxmlformats.org/drawingml/2006/main" xmlns:r="http://schemas.openxmlformats.org/officeDocument/2006/relationships" xmlns:p="http://schemas.openxmlformats.org/presentationml/2006/main">
-  <p:cSld>
-    <p:spTree>
-      <p:nvGrpSpPr>
-        <p:cNvPr id="1" name=""/>
-        <p:cNvGrpSpPr/>
-        <p:nvPr/>
-      </p:nvGrpSpPr>
-      <p:grpSpPr>
-        <a:xfrm>
-          <a:off x="0" y="0"/>
-          <a:ext cx="0" cy="0"/>
-          <a:chOff x="0" y="0"/>
-          <a:chExt cx="0" cy="0"/>
-        </a:xfrm>
-      </p:grpSpPr>
-      <p:sp>
-        <p:nvSpPr>
-          <p:cNvPr id="2" name="Slide Image Placeholder 1"/>
-          <p:cNvSpPr>
-            <a:spLocks noGrp="1" noRot="1" noChangeAspect="1"/>
-          </p:cNvSpPr>
-          <p:nvPr>
-            <p:ph type="sldImg"/>
-          </p:nvPr>
-        </p:nvSpPr>
-        <p:spPr/>
-      </p:sp>
-      <p:sp>
-        <p:nvSpPr>
-          <p:cNvPr id="3" name="Notes Placeholder 2"/>
-          <p:cNvSpPr>
-            <a:spLocks noGrp="1"/>
-          </p:cNvSpPr>
-          <p:nvPr>
-            <p:ph type="body" idx="1"/>
-          </p:nvPr>
-        </p:nvSpPr>
-        <p:spPr/>
-        <p:txBody>
-          <a:bodyPr/>
-          <a:lstStyle/>
-          <a:p>
-            <a:r>
-              <a:rPr lang="en-US" sz="1200" b="1" kern="1200" dirty="0">
-                <a:solidFill>
-                  <a:schemeClr val="tx1"/>
-                </a:solidFill>
-                <a:latin typeface="+mn-lt"/>
-                <a:ea typeface="+mn-ea"/>
-                <a:cs typeface="+mn-cs"/>
-              </a:rPr>
-              <a:t>D/d</a:t>
-            </a:r>
-            <a:r>
-              <a:rPr lang="en-US" b="1" dirty="0"/>
-              <a:t>: </a:t>
-            </a:r>
-            <a:r>
-              <a:rPr lang="en-US" dirty="0"/>
-              <a:t>Data section (global/local initialized variables).</a:t>
-            </a:r>
-          </a:p>
-          <a:p>
-            <a:endParaRPr lang="en-US" dirty="0"/>
-          </a:p>
-        </p:txBody>
-      </p:sp>
-      <p:sp>
-        <p:nvSpPr>
-          <p:cNvPr id="4" name="Slide Number Placeholder 3"/>
-          <p:cNvSpPr>
-            <a:spLocks noGrp="1"/>
-          </p:cNvSpPr>
-          <p:nvPr>
-            <p:ph type="sldNum" sz="quarter" idx="5"/>
-          </p:nvPr>
-        </p:nvSpPr>
-        <p:spPr/>
-        <p:txBody>
-          <a:bodyPr/>
-          <a:lstStyle/>
-          <a:p>
-            <a:fld id="{3C11C18F-566C-4A85-8022-99BE34D7F2A5}" type="slidenum">
-              <a:rPr lang="en-US" smtClean="0"/>
-              <a:t>20</a:t>
-            </a:fld>
-            <a:endParaRPr lang="en-US"/>
-          </a:p>
-        </p:txBody>
-      </p:sp>
-    </p:spTree>
-    <p:extLst>
-      <p:ext uri="{BB962C8B-B14F-4D97-AF65-F5344CB8AC3E}">
-        <p14:creationId xmlns:p14="http://schemas.microsoft.com/office/powerpoint/2010/main" val="2480268751"/>
-      </p:ext>
-    </p:extLst>
-  </p:cSld>
-  <p:clrMapOvr>
-    <a:masterClrMapping/>
-  </p:clrMapOvr>
-</p:notes>
-</file>
-
-<file path=ppt/notesSlides/notesSlide13.xml><?xml version="1.0" encoding="utf-8"?>
 <p:notes xmlns:a="http://schemas.openxmlformats.org/drawingml/2006/main" xmlns:r="http://schemas.openxmlformats.org/officeDocument/2006/relationships" xmlns:p="http://schemas.openxmlformats.org/presentationml/2006/main">
   <p:cSld>
     <p:spTree>
@@ -1021,7 +986,38 @@
               <a:defRPr/>
             </a:pPr>
             <a:r>
-              <a:rPr lang="en-US" sz="1200" b="1" kern="1200" dirty="0">
+              <a:rPr lang="en-US" b="1" dirty="0"/>
+              <a:t>Relocation Records</a:t>
+            </a:r>
+            <a:r>
+              <a:rPr lang="en-US" dirty="0"/>
+              <a:t>: </a:t>
+            </a:r>
+          </a:p>
+          <a:p>
+            <a:pPr marL="0" marR="0" lvl="0" indent="0" algn="l" defTabSz="914400" rtl="0" eaLnBrk="1" fontAlgn="auto" latinLnBrk="0" hangingPunct="1">
+              <a:lnSpc>
+                <a:spcPct val="100000"/>
+              </a:lnSpc>
+              <a:spcBef>
+                <a:spcPts val="0"/>
+              </a:spcBef>
+              <a:spcAft>
+                <a:spcPts val="0"/>
+              </a:spcAft>
+              <a:buClrTx/>
+              <a:buSzTx/>
+              <a:buFontTx/>
+              <a:buNone/>
+              <a:tabLst/>
+              <a:defRPr/>
+            </a:pPr>
+            <a:r>
+              <a:rPr lang="en-US" dirty="0"/>
+              <a:t>Shows where code needs patching (e.g., </a:t>
+            </a:r>
+            <a:r>
+              <a:rPr lang="en-US" sz="1200" kern="1200" dirty="0">
                 <a:solidFill>
                   <a:schemeClr val="tx1"/>
                 </a:solidFill>
@@ -1029,15 +1025,26 @@
                 <a:ea typeface="+mn-ea"/>
                 <a:cs typeface="+mn-cs"/>
               </a:rPr>
-              <a:t>T/t</a:t>
-            </a:r>
-            <a:r>
-              <a:rPr lang="en-US" b="1" dirty="0"/>
-              <a:t>: </a:t>
+              <a:t>R_X86_64_PC32</a:t>
             </a:r>
             <a:r>
               <a:rPr lang="en-US" dirty="0"/>
-              <a:t>Text section (global/local code).</a:t>
+              <a:t> for PC-relative calls).</a:t>
+            </a:r>
+          </a:p>
+          <a:p>
+            <a:endParaRPr lang="en-US" dirty="0"/>
+          </a:p>
+          <a:p>
+            <a:r>
+              <a:rPr lang="en-US" b="1" u="sng" dirty="0"/>
+              <a:t>See example:</a:t>
+            </a:r>
+          </a:p>
+          <a:p>
+            <a:r>
+              <a:rPr lang="en-US" dirty="0"/>
+              <a:t>Static Relocation directory</a:t>
             </a:r>
           </a:p>
           <a:p>
@@ -1062,7 +1069,7 @@
           <a:p>
             <a:fld id="{3C11C18F-566C-4A85-8022-99BE34D7F2A5}" type="slidenum">
               <a:rPr lang="en-US" smtClean="0"/>
-              <a:t>21</a:t>
+              <a:t>16</a:t>
             </a:fld>
             <a:endParaRPr lang="en-US"/>
           </a:p>
@@ -1071,7 +1078,137 @@
     </p:spTree>
     <p:extLst>
       <p:ext uri="{BB962C8B-B14F-4D97-AF65-F5344CB8AC3E}">
-        <p14:creationId xmlns:p14="http://schemas.microsoft.com/office/powerpoint/2010/main" val="1547209111"/>
+        <p14:creationId xmlns:p14="http://schemas.microsoft.com/office/powerpoint/2010/main" val="571153099"/>
+      </p:ext>
+    </p:extLst>
+  </p:cSld>
+  <p:clrMapOvr>
+    <a:masterClrMapping/>
+  </p:clrMapOvr>
+</p:notes>
+</file>
+
+<file path=ppt/notesSlides/notesSlide13.xml><?xml version="1.0" encoding="utf-8"?>
+<p:notes xmlns:a="http://schemas.openxmlformats.org/drawingml/2006/main" xmlns:r="http://schemas.openxmlformats.org/officeDocument/2006/relationships" xmlns:p="http://schemas.openxmlformats.org/presentationml/2006/main">
+  <p:cSld>
+    <p:spTree>
+      <p:nvGrpSpPr>
+        <p:cNvPr id="1" name=""/>
+        <p:cNvGrpSpPr/>
+        <p:nvPr/>
+      </p:nvGrpSpPr>
+      <p:grpSpPr>
+        <a:xfrm>
+          <a:off x="0" y="0"/>
+          <a:ext cx="0" cy="0"/>
+          <a:chOff x="0" y="0"/>
+          <a:chExt cx="0" cy="0"/>
+        </a:xfrm>
+      </p:grpSpPr>
+      <p:sp>
+        <p:nvSpPr>
+          <p:cNvPr id="2" name="Slide Image Placeholder 1"/>
+          <p:cNvSpPr>
+            <a:spLocks noGrp="1" noRot="1" noChangeAspect="1"/>
+          </p:cNvSpPr>
+          <p:nvPr>
+            <p:ph type="sldImg"/>
+          </p:nvPr>
+        </p:nvSpPr>
+        <p:spPr/>
+      </p:sp>
+      <p:sp>
+        <p:nvSpPr>
+          <p:cNvPr id="3" name="Notes Placeholder 2"/>
+          <p:cNvSpPr>
+            <a:spLocks noGrp="1"/>
+          </p:cNvSpPr>
+          <p:nvPr>
+            <p:ph type="body" idx="1"/>
+          </p:nvPr>
+        </p:nvSpPr>
+        <p:spPr/>
+        <p:txBody>
+          <a:bodyPr/>
+          <a:lstStyle/>
+          <a:p>
+            <a:r>
+              <a:rPr lang="en-US" sz="1200" b="1" kern="1200" dirty="0">
+                <a:solidFill>
+                  <a:schemeClr val="tx1"/>
+                </a:solidFill>
+                <a:latin typeface="+mn-lt"/>
+                <a:ea typeface="+mn-ea"/>
+                <a:cs typeface="+mn-cs"/>
+              </a:rPr>
+              <a:t>nm</a:t>
+            </a:r>
+            <a:r>
+              <a:rPr lang="en-US" dirty="0"/>
+              <a:t>: Shows symbol types and addresses.</a:t>
+            </a:r>
+          </a:p>
+          <a:p>
+            <a:endParaRPr lang="en-US" dirty="0"/>
+          </a:p>
+          <a:p>
+            <a:r>
+              <a:rPr lang="en-US" b="1" dirty="0"/>
+              <a:t>nm</a:t>
+            </a:r>
+            <a:r>
+              <a:rPr lang="en-US" dirty="0"/>
+              <a:t> is used to </a:t>
+            </a:r>
+            <a:r>
+              <a:rPr lang="en-US" b="1" dirty="0">
+                <a:effectLst/>
+              </a:rPr>
+              <a:t>list the symbols</a:t>
+            </a:r>
+            <a:r>
+              <a:rPr lang="en-US" dirty="0"/>
+              <a:t> from </a:t>
+            </a:r>
+          </a:p>
+          <a:p>
+            <a:r>
+              <a:rPr lang="en-US" dirty="0"/>
+              <a:t>object files, executable files, and object-file libraries.</a:t>
+            </a:r>
+          </a:p>
+          <a:p>
+            <a:endParaRPr lang="en-US" dirty="0"/>
+          </a:p>
+        </p:txBody>
+      </p:sp>
+      <p:sp>
+        <p:nvSpPr>
+          <p:cNvPr id="4" name="Slide Number Placeholder 3"/>
+          <p:cNvSpPr>
+            <a:spLocks noGrp="1"/>
+          </p:cNvSpPr>
+          <p:nvPr>
+            <p:ph type="sldNum" sz="quarter" idx="5"/>
+          </p:nvPr>
+        </p:nvSpPr>
+        <p:spPr/>
+        <p:txBody>
+          <a:bodyPr/>
+          <a:lstStyle/>
+          <a:p>
+            <a:fld id="{3C11C18F-566C-4A85-8022-99BE34D7F2A5}" type="slidenum">
+              <a:rPr lang="en-US" smtClean="0"/>
+              <a:t>17</a:t>
+            </a:fld>
+            <a:endParaRPr lang="en-US"/>
+          </a:p>
+        </p:txBody>
+      </p:sp>
+    </p:spTree>
+    <p:extLst>
+      <p:ext uri="{BB962C8B-B14F-4D97-AF65-F5344CB8AC3E}">
+        <p14:creationId xmlns:p14="http://schemas.microsoft.com/office/powerpoint/2010/main" val="1578416762"/>
       </p:ext>
     </p:extLst>
   </p:cSld>
@@ -1082,6 +1219,274 @@
 </file>
 
 <file path=ppt/notesSlides/notesSlide14.xml><?xml version="1.0" encoding="utf-8"?>
+<p:notes xmlns:a="http://schemas.openxmlformats.org/drawingml/2006/main" xmlns:r="http://schemas.openxmlformats.org/officeDocument/2006/relationships" xmlns:p="http://schemas.openxmlformats.org/presentationml/2006/main">
+  <p:cSld>
+    <p:spTree>
+      <p:nvGrpSpPr>
+        <p:cNvPr id="1" name=""/>
+        <p:cNvGrpSpPr/>
+        <p:nvPr/>
+      </p:nvGrpSpPr>
+      <p:grpSpPr>
+        <a:xfrm>
+          <a:off x="0" y="0"/>
+          <a:ext cx="0" cy="0"/>
+          <a:chOff x="0" y="0"/>
+          <a:chExt cx="0" cy="0"/>
+        </a:xfrm>
+      </p:grpSpPr>
+      <p:sp>
+        <p:nvSpPr>
+          <p:cNvPr id="2" name="Slide Image Placeholder 1"/>
+          <p:cNvSpPr>
+            <a:spLocks noGrp="1" noRot="1" noChangeAspect="1"/>
+          </p:cNvSpPr>
+          <p:nvPr>
+            <p:ph type="sldImg"/>
+          </p:nvPr>
+        </p:nvSpPr>
+        <p:spPr/>
+      </p:sp>
+      <p:sp>
+        <p:nvSpPr>
+          <p:cNvPr id="3" name="Notes Placeholder 2"/>
+          <p:cNvSpPr>
+            <a:spLocks noGrp="1"/>
+          </p:cNvSpPr>
+          <p:nvPr>
+            <p:ph type="body" idx="1"/>
+          </p:nvPr>
+        </p:nvSpPr>
+        <p:spPr/>
+        <p:txBody>
+          <a:bodyPr/>
+          <a:lstStyle/>
+          <a:p>
+            <a:r>
+              <a:rPr lang="en-US" dirty="0"/>
+              <a:t>A terminal output of a symbol table with various flags (D, T, U) </a:t>
+            </a:r>
+          </a:p>
+          <a:p>
+            <a:r>
+              <a:rPr lang="en-US" dirty="0"/>
+              <a:t>indicating the status of symbols like </a:t>
+            </a:r>
+            <a:r>
+              <a:rPr lang="en-US" sz="1200" kern="1200" dirty="0">
+                <a:solidFill>
+                  <a:schemeClr val="tx1"/>
+                </a:solidFill>
+                <a:latin typeface="+mn-lt"/>
+                <a:ea typeface="+mn-ea"/>
+                <a:cs typeface="+mn-cs"/>
+              </a:rPr>
+              <a:t>_</a:t>
+            </a:r>
+            <a:r>
+              <a:rPr lang="en-US" sz="1200" kern="1200" dirty="0" err="1">
+                <a:solidFill>
+                  <a:schemeClr val="tx1"/>
+                </a:solidFill>
+                <a:latin typeface="+mn-lt"/>
+                <a:ea typeface="+mn-ea"/>
+                <a:cs typeface="+mn-cs"/>
+              </a:rPr>
+              <a:t>global_var</a:t>
+            </a:r>
+            <a:r>
+              <a:rPr lang="en-US" dirty="0"/>
+              <a:t>, </a:t>
+            </a:r>
+            <a:r>
+              <a:rPr lang="en-US" sz="1200" kern="1200" dirty="0">
+                <a:solidFill>
+                  <a:schemeClr val="tx1"/>
+                </a:solidFill>
+                <a:latin typeface="+mn-lt"/>
+                <a:ea typeface="+mn-ea"/>
+                <a:cs typeface="+mn-cs"/>
+              </a:rPr>
+              <a:t>_main</a:t>
+            </a:r>
+            <a:r>
+              <a:rPr lang="en-US" dirty="0"/>
+              <a:t>, and the undefined </a:t>
+            </a:r>
+            <a:r>
+              <a:rPr lang="en-US" sz="1200" kern="1200" dirty="0">
+                <a:solidFill>
+                  <a:schemeClr val="tx1"/>
+                </a:solidFill>
+                <a:latin typeface="+mn-lt"/>
+                <a:ea typeface="+mn-ea"/>
+                <a:cs typeface="+mn-cs"/>
+              </a:rPr>
+              <a:t>_</a:t>
+            </a:r>
+            <a:r>
+              <a:rPr lang="en-US" sz="1200" kern="1200" dirty="0" err="1">
+                <a:solidFill>
+                  <a:schemeClr val="tx1"/>
+                </a:solidFill>
+                <a:latin typeface="+mn-lt"/>
+                <a:ea typeface="+mn-ea"/>
+                <a:cs typeface="+mn-cs"/>
+              </a:rPr>
+              <a:t>printf</a:t>
+            </a:r>
+            <a:r>
+              <a:rPr lang="en-US" dirty="0"/>
+              <a:t>.</a:t>
+            </a:r>
+          </a:p>
+          <a:p>
+            <a:endParaRPr lang="en-US" dirty="0"/>
+          </a:p>
+        </p:txBody>
+      </p:sp>
+      <p:sp>
+        <p:nvSpPr>
+          <p:cNvPr id="4" name="Slide Number Placeholder 3"/>
+          <p:cNvSpPr>
+            <a:spLocks noGrp="1"/>
+          </p:cNvSpPr>
+          <p:nvPr>
+            <p:ph type="sldNum" sz="quarter" idx="5"/>
+          </p:nvPr>
+        </p:nvSpPr>
+        <p:spPr/>
+        <p:txBody>
+          <a:bodyPr/>
+          <a:lstStyle/>
+          <a:p>
+            <a:fld id="{3C11C18F-566C-4A85-8022-99BE34D7F2A5}" type="slidenum">
+              <a:rPr lang="en-US" smtClean="0"/>
+              <a:t>18</a:t>
+            </a:fld>
+            <a:endParaRPr lang="en-US"/>
+          </a:p>
+        </p:txBody>
+      </p:sp>
+    </p:spTree>
+    <p:extLst>
+      <p:ext uri="{BB962C8B-B14F-4D97-AF65-F5344CB8AC3E}">
+        <p14:creationId xmlns:p14="http://schemas.microsoft.com/office/powerpoint/2010/main" val="3056962291"/>
+      </p:ext>
+    </p:extLst>
+  </p:cSld>
+  <p:clrMapOvr>
+    <a:masterClrMapping/>
+  </p:clrMapOvr>
+</p:notes>
+</file>
+
+<file path=ppt/notesSlides/notesSlide15.xml><?xml version="1.0" encoding="utf-8"?>
+<p:notes xmlns:a="http://schemas.openxmlformats.org/drawingml/2006/main" xmlns:r="http://schemas.openxmlformats.org/officeDocument/2006/relationships" xmlns:p="http://schemas.openxmlformats.org/presentationml/2006/main">
+  <p:cSld>
+    <p:spTree>
+      <p:nvGrpSpPr>
+        <p:cNvPr id="1" name=""/>
+        <p:cNvGrpSpPr/>
+        <p:nvPr/>
+      </p:nvGrpSpPr>
+      <p:grpSpPr>
+        <a:xfrm>
+          <a:off x="0" y="0"/>
+          <a:ext cx="0" cy="0"/>
+          <a:chOff x="0" y="0"/>
+          <a:chExt cx="0" cy="0"/>
+        </a:xfrm>
+      </p:grpSpPr>
+      <p:sp>
+        <p:nvSpPr>
+          <p:cNvPr id="2" name="Slide Image Placeholder 1"/>
+          <p:cNvSpPr>
+            <a:spLocks noGrp="1" noRot="1" noChangeAspect="1"/>
+          </p:cNvSpPr>
+          <p:nvPr>
+            <p:ph type="sldImg"/>
+          </p:nvPr>
+        </p:nvSpPr>
+        <p:spPr/>
+      </p:sp>
+      <p:sp>
+        <p:nvSpPr>
+          <p:cNvPr id="3" name="Notes Placeholder 2"/>
+          <p:cNvSpPr>
+            <a:spLocks noGrp="1"/>
+          </p:cNvSpPr>
+          <p:nvPr>
+            <p:ph type="body" idx="1"/>
+          </p:nvPr>
+        </p:nvSpPr>
+        <p:spPr/>
+        <p:txBody>
+          <a:bodyPr/>
+          <a:lstStyle/>
+          <a:p>
+            <a:r>
+              <a:rPr lang="en-US" sz="1200" b="1" kern="1200" dirty="0">
+                <a:solidFill>
+                  <a:schemeClr val="tx1"/>
+                </a:solidFill>
+                <a:latin typeface="+mn-lt"/>
+                <a:ea typeface="+mn-ea"/>
+                <a:cs typeface="+mn-cs"/>
+              </a:rPr>
+              <a:t>D/d</a:t>
+            </a:r>
+            <a:r>
+              <a:rPr lang="en-US" b="1" dirty="0"/>
+              <a:t>: </a:t>
+            </a:r>
+            <a:r>
+              <a:rPr lang="en-US" dirty="0"/>
+              <a:t>Data section (global/local initialized variables).</a:t>
+            </a:r>
+          </a:p>
+          <a:p>
+            <a:endParaRPr lang="en-US" dirty="0"/>
+          </a:p>
+        </p:txBody>
+      </p:sp>
+      <p:sp>
+        <p:nvSpPr>
+          <p:cNvPr id="4" name="Slide Number Placeholder 3"/>
+          <p:cNvSpPr>
+            <a:spLocks noGrp="1"/>
+          </p:cNvSpPr>
+          <p:nvPr>
+            <p:ph type="sldNum" sz="quarter" idx="5"/>
+          </p:nvPr>
+        </p:nvSpPr>
+        <p:spPr/>
+        <p:txBody>
+          <a:bodyPr/>
+          <a:lstStyle/>
+          <a:p>
+            <a:fld id="{3C11C18F-566C-4A85-8022-99BE34D7F2A5}" type="slidenum">
+              <a:rPr lang="en-US" smtClean="0"/>
+              <a:t>20</a:t>
+            </a:fld>
+            <a:endParaRPr lang="en-US"/>
+          </a:p>
+        </p:txBody>
+      </p:sp>
+    </p:spTree>
+    <p:extLst>
+      <p:ext uri="{BB962C8B-B14F-4D97-AF65-F5344CB8AC3E}">
+        <p14:creationId xmlns:p14="http://schemas.microsoft.com/office/powerpoint/2010/main" val="2480268751"/>
+      </p:ext>
+    </p:extLst>
+  </p:cSld>
+  <p:clrMapOvr>
+    <a:masterClrMapping/>
+  </p:clrMapOvr>
+</p:notes>
+</file>
+
+<file path=ppt/notesSlides/notesSlide16.xml><?xml version="1.0" encoding="utf-8"?>
 <p:notes xmlns:a="http://schemas.openxmlformats.org/drawingml/2006/main" xmlns:r="http://schemas.openxmlformats.org/officeDocument/2006/relationships" xmlns:p="http://schemas.openxmlformats.org/presentationml/2006/main">
   <p:cSld>
     <p:spTree>
@@ -1151,7 +1556,7 @@
                 <a:ea typeface="+mn-ea"/>
                 <a:cs typeface="+mn-cs"/>
               </a:rPr>
-              <a:t>U</a:t>
+              <a:t>T/t</a:t>
             </a:r>
             <a:r>
               <a:rPr lang="en-US" b="1" dirty="0"/>
@@ -1159,7 +1564,7 @@
             </a:r>
             <a:r>
               <a:rPr lang="en-US" dirty="0"/>
-              <a:t>Undefined (symbols used but not defined in the file).</a:t>
+              <a:t>Text section (global/local code).</a:t>
             </a:r>
           </a:p>
           <a:p>
@@ -1184,7 +1589,7 @@
           <a:p>
             <a:fld id="{3C11C18F-566C-4A85-8022-99BE34D7F2A5}" type="slidenum">
               <a:rPr lang="en-US" smtClean="0"/>
-              <a:t>22</a:t>
+              <a:t>21</a:t>
             </a:fld>
             <a:endParaRPr lang="en-US"/>
           </a:p>
@@ -1193,187 +1598,7 @@
     </p:spTree>
     <p:extLst>
       <p:ext uri="{BB962C8B-B14F-4D97-AF65-F5344CB8AC3E}">
-        <p14:creationId xmlns:p14="http://schemas.microsoft.com/office/powerpoint/2010/main" val="2767165308"/>
-      </p:ext>
-    </p:extLst>
-  </p:cSld>
-  <p:clrMapOvr>
-    <a:masterClrMapping/>
-  </p:clrMapOvr>
-</p:notes>
-</file>
-
-<file path=ppt/notesSlides/notesSlide15.xml><?xml version="1.0" encoding="utf-8"?>
-<p:notes xmlns:a="http://schemas.openxmlformats.org/drawingml/2006/main" xmlns:r="http://schemas.openxmlformats.org/officeDocument/2006/relationships" xmlns:p="http://schemas.openxmlformats.org/presentationml/2006/main">
-  <p:cSld>
-    <p:spTree>
-      <p:nvGrpSpPr>
-        <p:cNvPr id="1" name=""/>
-        <p:cNvGrpSpPr/>
-        <p:nvPr/>
-      </p:nvGrpSpPr>
-      <p:grpSpPr>
-        <a:xfrm>
-          <a:off x="0" y="0"/>
-          <a:ext cx="0" cy="0"/>
-          <a:chOff x="0" y="0"/>
-          <a:chExt cx="0" cy="0"/>
-        </a:xfrm>
-      </p:grpSpPr>
-      <p:sp>
-        <p:nvSpPr>
-          <p:cNvPr id="2" name="Slide Image Placeholder 1"/>
-          <p:cNvSpPr>
-            <a:spLocks noGrp="1" noRot="1" noChangeAspect="1"/>
-          </p:cNvSpPr>
-          <p:nvPr>
-            <p:ph type="sldImg"/>
-          </p:nvPr>
-        </p:nvSpPr>
-        <p:spPr/>
-      </p:sp>
-      <p:sp>
-        <p:nvSpPr>
-          <p:cNvPr id="3" name="Notes Placeholder 2"/>
-          <p:cNvSpPr>
-            <a:spLocks noGrp="1"/>
-          </p:cNvSpPr>
-          <p:nvPr>
-            <p:ph type="body" idx="1"/>
-          </p:nvPr>
-        </p:nvSpPr>
-        <p:spPr/>
-        <p:txBody>
-          <a:bodyPr/>
-          <a:lstStyle/>
-          <a:p>
-            <a:r>
-              <a:rPr lang="en-US" b="1" u="sng" dirty="0"/>
-              <a:t>See example:</a:t>
-            </a:r>
-          </a:p>
-          <a:p>
-            <a:r>
-              <a:rPr lang="en-US" dirty="0"/>
-              <a:t>Dynamic Relocation directory</a:t>
-            </a:r>
-          </a:p>
-          <a:p>
-            <a:endParaRPr lang="en-US" dirty="0"/>
-          </a:p>
-        </p:txBody>
-      </p:sp>
-      <p:sp>
-        <p:nvSpPr>
-          <p:cNvPr id="4" name="Slide Number Placeholder 3"/>
-          <p:cNvSpPr>
-            <a:spLocks noGrp="1"/>
-          </p:cNvSpPr>
-          <p:nvPr>
-            <p:ph type="sldNum" sz="quarter" idx="5"/>
-          </p:nvPr>
-        </p:nvSpPr>
-        <p:spPr/>
-        <p:txBody>
-          <a:bodyPr/>
-          <a:lstStyle/>
-          <a:p>
-            <a:fld id="{3C11C18F-566C-4A85-8022-99BE34D7F2A5}" type="slidenum">
-              <a:rPr lang="en-US" smtClean="0"/>
-              <a:t>26</a:t>
-            </a:fld>
-            <a:endParaRPr lang="en-US"/>
-          </a:p>
-        </p:txBody>
-      </p:sp>
-    </p:spTree>
-    <p:extLst>
-      <p:ext uri="{BB962C8B-B14F-4D97-AF65-F5344CB8AC3E}">
-        <p14:creationId xmlns:p14="http://schemas.microsoft.com/office/powerpoint/2010/main" val="2603777518"/>
-      </p:ext>
-    </p:extLst>
-  </p:cSld>
-  <p:clrMapOvr>
-    <a:masterClrMapping/>
-  </p:clrMapOvr>
-</p:notes>
-</file>
-
-<file path=ppt/notesSlides/notesSlide16.xml><?xml version="1.0" encoding="utf-8"?>
-<p:notes xmlns:a="http://schemas.openxmlformats.org/drawingml/2006/main" xmlns:r="http://schemas.openxmlformats.org/officeDocument/2006/relationships" xmlns:p="http://schemas.openxmlformats.org/presentationml/2006/main">
-  <p:cSld>
-    <p:spTree>
-      <p:nvGrpSpPr>
-        <p:cNvPr id="1" name=""/>
-        <p:cNvGrpSpPr/>
-        <p:nvPr/>
-      </p:nvGrpSpPr>
-      <p:grpSpPr>
-        <a:xfrm>
-          <a:off x="0" y="0"/>
-          <a:ext cx="0" cy="0"/>
-          <a:chOff x="0" y="0"/>
-          <a:chExt cx="0" cy="0"/>
-        </a:xfrm>
-      </p:grpSpPr>
-      <p:sp>
-        <p:nvSpPr>
-          <p:cNvPr id="2" name="Slide Image Placeholder 1"/>
-          <p:cNvSpPr>
-            <a:spLocks noGrp="1" noRot="1" noChangeAspect="1"/>
-          </p:cNvSpPr>
-          <p:nvPr>
-            <p:ph type="sldImg"/>
-          </p:nvPr>
-        </p:nvSpPr>
-        <p:spPr/>
-      </p:sp>
-      <p:sp>
-        <p:nvSpPr>
-          <p:cNvPr id="3" name="Notes Placeholder 2"/>
-          <p:cNvSpPr>
-            <a:spLocks noGrp="1"/>
-          </p:cNvSpPr>
-          <p:nvPr>
-            <p:ph type="body" idx="1"/>
-          </p:nvPr>
-        </p:nvSpPr>
-        <p:spPr/>
-        <p:txBody>
-          <a:bodyPr/>
-          <a:lstStyle/>
-          <a:p>
-            <a:endParaRPr lang="en-US" dirty="0"/>
-          </a:p>
-        </p:txBody>
-      </p:sp>
-      <p:sp>
-        <p:nvSpPr>
-          <p:cNvPr id="4" name="Slide Number Placeholder 3"/>
-          <p:cNvSpPr>
-            <a:spLocks noGrp="1"/>
-          </p:cNvSpPr>
-          <p:nvPr>
-            <p:ph type="sldNum" sz="quarter" idx="5"/>
-          </p:nvPr>
-        </p:nvSpPr>
-        <p:spPr/>
-        <p:txBody>
-          <a:bodyPr/>
-          <a:lstStyle/>
-          <a:p>
-            <a:fld id="{3C11C18F-566C-4A85-8022-99BE34D7F2A5}" type="slidenum">
-              <a:rPr lang="en-US" smtClean="0"/>
-              <a:t>27</a:t>
-            </a:fld>
-            <a:endParaRPr lang="en-US"/>
-          </a:p>
-        </p:txBody>
-      </p:sp>
-    </p:spTree>
-    <p:extLst>
-      <p:ext uri="{BB962C8B-B14F-4D97-AF65-F5344CB8AC3E}">
-        <p14:creationId xmlns:p14="http://schemas.microsoft.com/office/powerpoint/2010/main" val="551663661"/>
+        <p14:creationId xmlns:p14="http://schemas.microsoft.com/office/powerpoint/2010/main" val="1547209111"/>
       </p:ext>
     </p:extLst>
   </p:cSld>
@@ -1384,113 +1609,6 @@
 </file>
 
 <file path=ppt/notesSlides/notesSlide17.xml><?xml version="1.0" encoding="utf-8"?>
-<p:notes xmlns:a="http://schemas.openxmlformats.org/drawingml/2006/main" xmlns:r="http://schemas.openxmlformats.org/officeDocument/2006/relationships" xmlns:p="http://schemas.openxmlformats.org/presentationml/2006/main">
-  <p:cSld>
-    <p:spTree>
-      <p:nvGrpSpPr>
-        <p:cNvPr id="1" name=""/>
-        <p:cNvGrpSpPr/>
-        <p:nvPr/>
-      </p:nvGrpSpPr>
-      <p:grpSpPr>
-        <a:xfrm>
-          <a:off x="0" y="0"/>
-          <a:ext cx="0" cy="0"/>
-          <a:chOff x="0" y="0"/>
-          <a:chExt cx="0" cy="0"/>
-        </a:xfrm>
-      </p:grpSpPr>
-      <p:sp>
-        <p:nvSpPr>
-          <p:cNvPr id="2" name="Slide Image Placeholder 1"/>
-          <p:cNvSpPr>
-            <a:spLocks noGrp="1" noRot="1" noChangeAspect="1"/>
-          </p:cNvSpPr>
-          <p:nvPr>
-            <p:ph type="sldImg"/>
-          </p:nvPr>
-        </p:nvSpPr>
-        <p:spPr/>
-      </p:sp>
-      <p:sp>
-        <p:nvSpPr>
-          <p:cNvPr id="3" name="Notes Placeholder 2"/>
-          <p:cNvSpPr>
-            <a:spLocks noGrp="1"/>
-          </p:cNvSpPr>
-          <p:nvPr>
-            <p:ph type="body" idx="1"/>
-          </p:nvPr>
-        </p:nvSpPr>
-        <p:spPr/>
-        <p:txBody>
-          <a:bodyPr/>
-          <a:lstStyle/>
-          <a:p>
-            <a:r>
-              <a:rPr lang="en-US" sz="1200" b="1" kern="1200" dirty="0" err="1">
-                <a:solidFill>
-                  <a:schemeClr val="tx1"/>
-                </a:solidFill>
-                <a:latin typeface="+mn-lt"/>
-                <a:ea typeface="+mn-ea"/>
-                <a:cs typeface="+mn-cs"/>
-              </a:rPr>
-              <a:t>vmmap</a:t>
-            </a:r>
-            <a:r>
-              <a:rPr lang="en-US" dirty="0"/>
-              <a:t>: </a:t>
-            </a:r>
-          </a:p>
-          <a:p>
-            <a:r>
-              <a:rPr lang="en-US" dirty="0"/>
-              <a:t>Provides detailed memory layout for a process.</a:t>
-            </a:r>
-          </a:p>
-          <a:p>
-            <a:endParaRPr lang="en-US" dirty="0"/>
-          </a:p>
-        </p:txBody>
-      </p:sp>
-      <p:sp>
-        <p:nvSpPr>
-          <p:cNvPr id="4" name="Slide Number Placeholder 3"/>
-          <p:cNvSpPr>
-            <a:spLocks noGrp="1"/>
-          </p:cNvSpPr>
-          <p:nvPr>
-            <p:ph type="sldNum" sz="quarter" idx="5"/>
-          </p:nvPr>
-        </p:nvSpPr>
-        <p:spPr/>
-        <p:txBody>
-          <a:bodyPr/>
-          <a:lstStyle/>
-          <a:p>
-            <a:fld id="{3C11C18F-566C-4A85-8022-99BE34D7F2A5}" type="slidenum">
-              <a:rPr lang="en-US" smtClean="0"/>
-              <a:t>29</a:t>
-            </a:fld>
-            <a:endParaRPr lang="en-US"/>
-          </a:p>
-        </p:txBody>
-      </p:sp>
-    </p:spTree>
-    <p:extLst>
-      <p:ext uri="{BB962C8B-B14F-4D97-AF65-F5344CB8AC3E}">
-        <p14:creationId xmlns:p14="http://schemas.microsoft.com/office/powerpoint/2010/main" val="2968185692"/>
-      </p:ext>
-    </p:extLst>
-  </p:cSld>
-  <p:clrMapOvr>
-    <a:masterClrMapping/>
-  </p:clrMapOvr>
-</p:notes>
-</file>
-
-<file path=ppt/notesSlides/notesSlide18.xml><?xml version="1.0" encoding="utf-8"?>
 <p:notes xmlns:a="http://schemas.openxmlformats.org/drawingml/2006/main" xmlns:r="http://schemas.openxmlformats.org/officeDocument/2006/relationships" xmlns:p="http://schemas.openxmlformats.org/presentationml/2006/main">
   <p:cSld>
     <p:spTree>
@@ -1552,12 +1670,23 @@
               <a:defRPr/>
             </a:pPr>
             <a:r>
+              <a:rPr lang="en-US" sz="1200" b="1" kern="1200" dirty="0">
+                <a:solidFill>
+                  <a:schemeClr val="tx1"/>
+                </a:solidFill>
+                <a:latin typeface="+mn-lt"/>
+                <a:ea typeface="+mn-ea"/>
+                <a:cs typeface="+mn-cs"/>
+              </a:rPr>
+              <a:t>U</a:t>
+            </a:r>
+            <a:r>
               <a:rPr lang="en-US" b="1" dirty="0"/>
-              <a:t>Resident Size (RSS)</a:t>
+              <a:t>: </a:t>
             </a:r>
             <a:r>
               <a:rPr lang="en-US" dirty="0"/>
-              <a:t>: Memory actually in RAM.</a:t>
+              <a:t>Undefined (symbols used but not defined in the file).</a:t>
             </a:r>
           </a:p>
           <a:p>
@@ -1582,7 +1711,7 @@
           <a:p>
             <a:fld id="{3C11C18F-566C-4A85-8022-99BE34D7F2A5}" type="slidenum">
               <a:rPr lang="en-US" smtClean="0"/>
-              <a:t>31</a:t>
+              <a:t>22</a:t>
             </a:fld>
             <a:endParaRPr lang="en-US"/>
           </a:p>
@@ -1591,7 +1720,103 @@
     </p:spTree>
     <p:extLst>
       <p:ext uri="{BB962C8B-B14F-4D97-AF65-F5344CB8AC3E}">
-        <p14:creationId xmlns:p14="http://schemas.microsoft.com/office/powerpoint/2010/main" val="1974297098"/>
+        <p14:creationId xmlns:p14="http://schemas.microsoft.com/office/powerpoint/2010/main" val="2767165308"/>
+      </p:ext>
+    </p:extLst>
+  </p:cSld>
+  <p:clrMapOvr>
+    <a:masterClrMapping/>
+  </p:clrMapOvr>
+</p:notes>
+</file>
+
+<file path=ppt/notesSlides/notesSlide18.xml><?xml version="1.0" encoding="utf-8"?>
+<p:notes xmlns:a="http://schemas.openxmlformats.org/drawingml/2006/main" xmlns:r="http://schemas.openxmlformats.org/officeDocument/2006/relationships" xmlns:p="http://schemas.openxmlformats.org/presentationml/2006/main">
+  <p:cSld>
+    <p:spTree>
+      <p:nvGrpSpPr>
+        <p:cNvPr id="1" name=""/>
+        <p:cNvGrpSpPr/>
+        <p:nvPr/>
+      </p:nvGrpSpPr>
+      <p:grpSpPr>
+        <a:xfrm>
+          <a:off x="0" y="0"/>
+          <a:ext cx="0" cy="0"/>
+          <a:chOff x="0" y="0"/>
+          <a:chExt cx="0" cy="0"/>
+        </a:xfrm>
+      </p:grpSpPr>
+      <p:sp>
+        <p:nvSpPr>
+          <p:cNvPr id="2" name="Slide Image Placeholder 1"/>
+          <p:cNvSpPr>
+            <a:spLocks noGrp="1" noRot="1" noChangeAspect="1"/>
+          </p:cNvSpPr>
+          <p:nvPr>
+            <p:ph type="sldImg"/>
+          </p:nvPr>
+        </p:nvSpPr>
+        <p:spPr/>
+      </p:sp>
+      <p:sp>
+        <p:nvSpPr>
+          <p:cNvPr id="3" name="Notes Placeholder 2"/>
+          <p:cNvSpPr>
+            <a:spLocks noGrp="1"/>
+          </p:cNvSpPr>
+          <p:nvPr>
+            <p:ph type="body" idx="1"/>
+          </p:nvPr>
+        </p:nvSpPr>
+        <p:spPr/>
+        <p:txBody>
+          <a:bodyPr/>
+          <a:lstStyle/>
+          <a:p>
+            <a:r>
+              <a:rPr lang="en-US" b="1" u="sng" dirty="0"/>
+              <a:t>See example:</a:t>
+            </a:r>
+          </a:p>
+          <a:p>
+            <a:r>
+              <a:rPr lang="en-US" dirty="0"/>
+              <a:t>Dynamic Relocation directory</a:t>
+            </a:r>
+          </a:p>
+          <a:p>
+            <a:endParaRPr lang="en-US" dirty="0"/>
+          </a:p>
+        </p:txBody>
+      </p:sp>
+      <p:sp>
+        <p:nvSpPr>
+          <p:cNvPr id="4" name="Slide Number Placeholder 3"/>
+          <p:cNvSpPr>
+            <a:spLocks noGrp="1"/>
+          </p:cNvSpPr>
+          <p:nvPr>
+            <p:ph type="sldNum" sz="quarter" idx="5"/>
+          </p:nvPr>
+        </p:nvSpPr>
+        <p:spPr/>
+        <p:txBody>
+          <a:bodyPr/>
+          <a:lstStyle/>
+          <a:p>
+            <a:fld id="{3C11C18F-566C-4A85-8022-99BE34D7F2A5}" type="slidenum">
+              <a:rPr lang="en-US" smtClean="0"/>
+              <a:t>26</a:t>
+            </a:fld>
+            <a:endParaRPr lang="en-US"/>
+          </a:p>
+        </p:txBody>
+      </p:sp>
+    </p:spTree>
+    <p:extLst>
+      <p:ext uri="{BB962C8B-B14F-4D97-AF65-F5344CB8AC3E}">
+        <p14:creationId xmlns:p14="http://schemas.microsoft.com/office/powerpoint/2010/main" val="2603777518"/>
       </p:ext>
     </p:extLst>
   </p:cSld>
@@ -1645,14 +1870,171 @@
           <a:bodyPr/>
           <a:lstStyle/>
           <a:p>
-            <a:r>
-              <a:rPr lang="en-US" b="1" dirty="0"/>
-              <a:t>Dirty Size</a:t>
-            </a:r>
-            <a:r>
-              <a:rPr lang="en-US" dirty="0"/>
-              <a:t>: Modified memory not backed by a file.</a:t>
-            </a:r>
+            <a:pPr marL="0" marR="0" lvl="0" indent="0" algn="l" defTabSz="914400" rtl="0" eaLnBrk="1" fontAlgn="auto" latinLnBrk="0" hangingPunct="1">
+              <a:lnSpc>
+                <a:spcPct val="100000"/>
+              </a:lnSpc>
+              <a:spcBef>
+                <a:spcPts val="0"/>
+              </a:spcBef>
+              <a:spcAft>
+                <a:spcPts val="0"/>
+              </a:spcAft>
+              <a:buClrTx/>
+              <a:buSzTx/>
+              <a:buFontTx/>
+              <a:buNone/>
+              <a:tabLst/>
+              <a:defRPr/>
+            </a:pPr>
+            <a:r>
+              <a:rPr lang="en-US" sz="1200" b="0" dirty="0">
+                <a:solidFill>
+                  <a:srgbClr val="A00C30"/>
+                </a:solidFill>
+                <a:latin typeface="Arial"/>
+                <a:cs typeface="Arial"/>
+              </a:rPr>
+              <a:t>nm</a:t>
+            </a:r>
+            <a:r>
+              <a:rPr lang="en-US" sz="1200" b="0" spc="-5" dirty="0">
+                <a:solidFill>
+                  <a:srgbClr val="A00C30"/>
+                </a:solidFill>
+                <a:latin typeface="Arial"/>
+                <a:cs typeface="Arial"/>
+              </a:rPr>
+              <a:t> </a:t>
+            </a:r>
+            <a:r>
+              <a:rPr lang="en-US" sz="1200" b="0" spc="-10" dirty="0">
+                <a:solidFill>
+                  <a:srgbClr val="A00C30"/>
+                </a:solidFill>
+                <a:latin typeface="Arial"/>
+                <a:cs typeface="Arial"/>
+              </a:rPr>
+              <a:t>-</a:t>
+            </a:r>
+            <a:r>
+              <a:rPr lang="en-US" sz="1200" b="0" dirty="0">
+                <a:solidFill>
+                  <a:srgbClr val="A00C30"/>
+                </a:solidFill>
+                <a:latin typeface="Arial"/>
+                <a:cs typeface="Arial"/>
+              </a:rPr>
+              <a:t>g</a:t>
+            </a:r>
+            <a:r>
+              <a:rPr lang="en-US" sz="1200" b="0" spc="-5" dirty="0">
+                <a:solidFill>
+                  <a:srgbClr val="A00C30"/>
+                </a:solidFill>
+                <a:latin typeface="Arial"/>
+                <a:cs typeface="Arial"/>
+              </a:rPr>
+              <a:t> </a:t>
+            </a:r>
+            <a:r>
+              <a:rPr lang="en-US" sz="1200" b="0" spc="-10" dirty="0">
+                <a:solidFill>
+                  <a:srgbClr val="A00C30"/>
+                </a:solidFill>
+                <a:latin typeface="Arial"/>
+                <a:cs typeface="Arial"/>
+              </a:rPr>
+              <a:t>relocation_example2</a:t>
+            </a:r>
+          </a:p>
+          <a:p>
+            <a:pPr marL="0" marR="0" lvl="0" indent="0" algn="l" defTabSz="914400" rtl="0" eaLnBrk="1" fontAlgn="auto" latinLnBrk="0" hangingPunct="1">
+              <a:lnSpc>
+                <a:spcPct val="100000"/>
+              </a:lnSpc>
+              <a:spcBef>
+                <a:spcPts val="0"/>
+              </a:spcBef>
+              <a:spcAft>
+                <a:spcPts val="0"/>
+              </a:spcAft>
+              <a:buClrTx/>
+              <a:buSzTx/>
+              <a:buFontTx/>
+              <a:buNone/>
+              <a:tabLst/>
+              <a:defRPr/>
+            </a:pPr>
+            <a:endParaRPr lang="en-US" sz="1200" b="0" spc="-10" dirty="0">
+              <a:solidFill>
+                <a:srgbClr val="A00C30"/>
+              </a:solidFill>
+              <a:latin typeface="Arial"/>
+              <a:cs typeface="Arial"/>
+            </a:endParaRPr>
+          </a:p>
+          <a:p>
+            <a:pPr marL="0" marR="0" lvl="0" indent="0" algn="l" defTabSz="914400" rtl="0" eaLnBrk="1" fontAlgn="auto" latinLnBrk="0" hangingPunct="1">
+              <a:lnSpc>
+                <a:spcPct val="100000"/>
+              </a:lnSpc>
+              <a:spcBef>
+                <a:spcPts val="0"/>
+              </a:spcBef>
+              <a:spcAft>
+                <a:spcPts val="0"/>
+              </a:spcAft>
+              <a:buClrTx/>
+              <a:buSzTx/>
+              <a:buFontTx/>
+              <a:buNone/>
+              <a:tabLst/>
+              <a:defRPr/>
+            </a:pPr>
+            <a:r>
+              <a:rPr lang="en-US" sz="1200" b="0" spc="-10" dirty="0" err="1">
+                <a:solidFill>
+                  <a:srgbClr val="A00C30"/>
+                </a:solidFill>
+                <a:latin typeface="Arial"/>
+                <a:cs typeface="Arial"/>
+              </a:rPr>
+              <a:t>print_global’s</a:t>
+            </a:r>
+            <a:r>
+              <a:rPr lang="en-US" sz="1200" b="0" spc="-10" dirty="0">
+                <a:solidFill>
+                  <a:srgbClr val="A00C30"/>
+                </a:solidFill>
+                <a:latin typeface="Arial"/>
+                <a:cs typeface="Arial"/>
+              </a:rPr>
+              <a:t> address will be undefined until runtime.</a:t>
+            </a:r>
+          </a:p>
+          <a:p>
+            <a:pPr marL="0" marR="0" lvl="0" indent="0" algn="l" defTabSz="914400" rtl="0" eaLnBrk="1" fontAlgn="auto" latinLnBrk="0" hangingPunct="1">
+              <a:lnSpc>
+                <a:spcPct val="100000"/>
+              </a:lnSpc>
+              <a:spcBef>
+                <a:spcPts val="0"/>
+              </a:spcBef>
+              <a:spcAft>
+                <a:spcPts val="0"/>
+              </a:spcAft>
+              <a:buClrTx/>
+              <a:buSzTx/>
+              <a:buFontTx/>
+              <a:buNone/>
+              <a:tabLst/>
+              <a:defRPr/>
+            </a:pPr>
+            <a:endParaRPr lang="en-US" sz="1200" b="0" dirty="0">
+              <a:latin typeface="Arial"/>
+              <a:cs typeface="Arial"/>
+            </a:endParaRPr>
           </a:p>
           <a:p>
             <a:endParaRPr lang="en-US" dirty="0"/>
@@ -1676,7 +2058,7 @@
           <a:p>
             <a:fld id="{3C11C18F-566C-4A85-8022-99BE34D7F2A5}" type="slidenum">
               <a:rPr lang="en-US" smtClean="0"/>
-              <a:t>32</a:t>
+              <a:t>27</a:t>
             </a:fld>
             <a:endParaRPr lang="en-US"/>
           </a:p>
@@ -1685,7 +2067,7 @@
     </p:spTree>
     <p:extLst>
       <p:ext uri="{BB962C8B-B14F-4D97-AF65-F5344CB8AC3E}">
-        <p14:creationId xmlns:p14="http://schemas.microsoft.com/office/powerpoint/2010/main" val="440136998"/>
+        <p14:creationId xmlns:p14="http://schemas.microsoft.com/office/powerpoint/2010/main" val="551663661"/>
       </p:ext>
     </p:extLst>
   </p:cSld>
@@ -1766,7 +2148,14 @@
             </a:br>
             <a:r>
               <a:rPr lang="en-US" dirty="0"/>
-              <a:t>The executable is self-sufficient because all library code is included; the target machine doesn't need the library pre-installed.</a:t>
+              <a:t>The executable is self-sufficient because all library code is included; </a:t>
+            </a:r>
+            <a:br>
+              <a:rPr lang="en-US" dirty="0"/>
+            </a:br>
+            <a:r>
+              <a:rPr lang="en-US" dirty="0"/>
+              <a:t>the target machine doesn't need the library pre-installed.</a:t>
             </a:r>
           </a:p>
           <a:p>
@@ -1951,6 +2340,710 @@
           <a:bodyPr/>
           <a:lstStyle/>
           <a:p>
+            <a:pPr marL="0" marR="0" lvl="0" indent="0" algn="l" defTabSz="914400" rtl="0" eaLnBrk="1" fontAlgn="auto" latinLnBrk="0" hangingPunct="1">
+              <a:lnSpc>
+                <a:spcPct val="100000"/>
+              </a:lnSpc>
+              <a:spcBef>
+                <a:spcPts val="0"/>
+              </a:spcBef>
+              <a:spcAft>
+                <a:spcPts val="0"/>
+              </a:spcAft>
+              <a:buClrTx/>
+              <a:buSzTx/>
+              <a:buFontTx/>
+              <a:buNone/>
+              <a:tabLst/>
+              <a:defRPr/>
+            </a:pPr>
+            <a:r>
+              <a:rPr lang="en-US" sz="1200" b="1" i="0" u="none" kern="1200" dirty="0">
+                <a:solidFill>
+                  <a:schemeClr val="tx1"/>
+                </a:solidFill>
+                <a:effectLst/>
+                <a:latin typeface="+mn-lt"/>
+                <a:ea typeface="+mn-ea"/>
+                <a:cs typeface="+mn-cs"/>
+              </a:rPr>
+              <a:t>Use this command first before executing:</a:t>
+            </a:r>
+          </a:p>
+          <a:p>
+            <a:pPr marL="0" marR="0" lvl="0" indent="0" algn="l" defTabSz="914400" rtl="0" eaLnBrk="1" fontAlgn="auto" latinLnBrk="0" hangingPunct="1">
+              <a:lnSpc>
+                <a:spcPct val="100000"/>
+              </a:lnSpc>
+              <a:spcBef>
+                <a:spcPts val="0"/>
+              </a:spcBef>
+              <a:spcAft>
+                <a:spcPts val="0"/>
+              </a:spcAft>
+              <a:buClrTx/>
+              <a:buSzTx/>
+              <a:buFontTx/>
+              <a:buNone/>
+              <a:tabLst/>
+              <a:defRPr/>
+            </a:pPr>
+            <a:r>
+              <a:rPr lang="en-US" sz="1200" b="0" i="0" kern="1200" dirty="0">
+                <a:solidFill>
+                  <a:schemeClr val="tx1"/>
+                </a:solidFill>
+                <a:effectLst/>
+                <a:latin typeface="+mn-lt"/>
+                <a:ea typeface="+mn-ea"/>
+                <a:cs typeface="+mn-cs"/>
+              </a:rPr>
+              <a:t>export LD_LIBRARY_PATH=$LD_LIBRARY_PATH:.</a:t>
+            </a:r>
+          </a:p>
+          <a:p>
+            <a:endParaRPr lang="en-US" dirty="0"/>
+          </a:p>
+        </p:txBody>
+      </p:sp>
+      <p:sp>
+        <p:nvSpPr>
+          <p:cNvPr id="4" name="Slide Number Placeholder 3"/>
+          <p:cNvSpPr>
+            <a:spLocks noGrp="1"/>
+          </p:cNvSpPr>
+          <p:nvPr>
+            <p:ph type="sldNum" sz="quarter" idx="5"/>
+          </p:nvPr>
+        </p:nvSpPr>
+        <p:spPr/>
+        <p:txBody>
+          <a:bodyPr/>
+          <a:lstStyle/>
+          <a:p>
+            <a:fld id="{3C11C18F-566C-4A85-8022-99BE34D7F2A5}" type="slidenum">
+              <a:rPr lang="en-US" smtClean="0"/>
+              <a:t>28</a:t>
+            </a:fld>
+            <a:endParaRPr lang="en-US"/>
+          </a:p>
+        </p:txBody>
+      </p:sp>
+    </p:spTree>
+    <p:extLst>
+      <p:ext uri="{BB962C8B-B14F-4D97-AF65-F5344CB8AC3E}">
+        <p14:creationId xmlns:p14="http://schemas.microsoft.com/office/powerpoint/2010/main" val="2290177571"/>
+      </p:ext>
+    </p:extLst>
+  </p:cSld>
+  <p:clrMapOvr>
+    <a:masterClrMapping/>
+  </p:clrMapOvr>
+</p:notes>
+</file>
+
+<file path=ppt/notesSlides/notesSlide21.xml><?xml version="1.0" encoding="utf-8"?>
+<p:notes xmlns:a="http://schemas.openxmlformats.org/drawingml/2006/main" xmlns:r="http://schemas.openxmlformats.org/officeDocument/2006/relationships" xmlns:p="http://schemas.openxmlformats.org/presentationml/2006/main">
+  <p:cSld>
+    <p:spTree>
+      <p:nvGrpSpPr>
+        <p:cNvPr id="1" name=""/>
+        <p:cNvGrpSpPr/>
+        <p:nvPr/>
+      </p:nvGrpSpPr>
+      <p:grpSpPr>
+        <a:xfrm>
+          <a:off x="0" y="0"/>
+          <a:ext cx="0" cy="0"/>
+          <a:chOff x="0" y="0"/>
+          <a:chExt cx="0" cy="0"/>
+        </a:xfrm>
+      </p:grpSpPr>
+      <p:sp>
+        <p:nvSpPr>
+          <p:cNvPr id="2" name="Slide Image Placeholder 1"/>
+          <p:cNvSpPr>
+            <a:spLocks noGrp="1" noRot="1" noChangeAspect="1"/>
+          </p:cNvSpPr>
+          <p:nvPr>
+            <p:ph type="sldImg"/>
+          </p:nvPr>
+        </p:nvSpPr>
+        <p:spPr/>
+      </p:sp>
+      <p:sp>
+        <p:nvSpPr>
+          <p:cNvPr id="3" name="Notes Placeholder 2"/>
+          <p:cNvSpPr>
+            <a:spLocks noGrp="1"/>
+          </p:cNvSpPr>
+          <p:nvPr>
+            <p:ph type="body" idx="1"/>
+          </p:nvPr>
+        </p:nvSpPr>
+        <p:spPr/>
+        <p:txBody>
+          <a:bodyPr/>
+          <a:lstStyle/>
+          <a:p>
+            <a:r>
+              <a:rPr lang="en-US" sz="1200" b="1" kern="1200" dirty="0">
+                <a:solidFill>
+                  <a:schemeClr val="tx1"/>
+                </a:solidFill>
+                <a:latin typeface="+mn-lt"/>
+                <a:ea typeface="+mn-ea"/>
+                <a:cs typeface="+mn-cs"/>
+              </a:rPr>
+              <a:t>top:</a:t>
+            </a:r>
+          </a:p>
+          <a:p>
+            <a:r>
+              <a:rPr lang="en-US" dirty="0"/>
+              <a:t>MacOS: top -o mem</a:t>
+            </a:r>
+          </a:p>
+          <a:p>
+            <a:r>
+              <a:rPr lang="en-US" dirty="0"/>
+              <a:t>Linux: top -o RES</a:t>
+            </a:r>
+          </a:p>
+          <a:p>
+            <a:endParaRPr lang="en-US" sz="1200" b="1" kern="1200" dirty="0">
+              <a:solidFill>
+                <a:schemeClr val="tx1"/>
+              </a:solidFill>
+              <a:latin typeface="+mn-lt"/>
+              <a:ea typeface="+mn-ea"/>
+              <a:cs typeface="+mn-cs"/>
+            </a:endParaRPr>
+          </a:p>
+          <a:p>
+            <a:r>
+              <a:rPr lang="en-US" sz="1200" b="1" kern="1200" dirty="0" err="1">
+                <a:solidFill>
+                  <a:schemeClr val="tx1"/>
+                </a:solidFill>
+                <a:latin typeface="+mn-lt"/>
+                <a:ea typeface="+mn-ea"/>
+                <a:cs typeface="+mn-cs"/>
+              </a:rPr>
+              <a:t>ps</a:t>
+            </a:r>
+            <a:r>
+              <a:rPr lang="en-US" sz="1200" b="1" kern="1200" dirty="0">
+                <a:solidFill>
+                  <a:schemeClr val="tx1"/>
+                </a:solidFill>
+                <a:latin typeface="+mn-lt"/>
+                <a:ea typeface="+mn-ea"/>
+                <a:cs typeface="+mn-cs"/>
+              </a:rPr>
+              <a:t>:</a:t>
+            </a:r>
+          </a:p>
+          <a:p>
+            <a:r>
+              <a:rPr lang="en-US" sz="1200" b="0" i="0" kern="1200" dirty="0">
+                <a:solidFill>
+                  <a:schemeClr val="tx1"/>
+                </a:solidFill>
+                <a:effectLst/>
+                <a:latin typeface="+mn-lt"/>
+                <a:ea typeface="+mn-ea"/>
+                <a:cs typeface="+mn-cs"/>
+              </a:rPr>
+              <a:t>Lists processes for the current shell session</a:t>
+            </a:r>
+            <a:endParaRPr lang="en-US" sz="1200" b="1" kern="1200" dirty="0">
+              <a:solidFill>
+                <a:schemeClr val="tx1"/>
+              </a:solidFill>
+              <a:latin typeface="+mn-lt"/>
+              <a:ea typeface="+mn-ea"/>
+              <a:cs typeface="+mn-cs"/>
+            </a:endParaRPr>
+          </a:p>
+          <a:p>
+            <a:pPr marL="0" marR="0" lvl="0" indent="0" algn="l" defTabSz="914400" rtl="0" eaLnBrk="1" fontAlgn="auto" latinLnBrk="0" hangingPunct="1">
+              <a:lnSpc>
+                <a:spcPct val="100000"/>
+              </a:lnSpc>
+              <a:spcBef>
+                <a:spcPts val="0"/>
+              </a:spcBef>
+              <a:spcAft>
+                <a:spcPts val="0"/>
+              </a:spcAft>
+              <a:buClrTx/>
+              <a:buSzTx/>
+              <a:buFontTx/>
+              <a:buNone/>
+              <a:tabLst/>
+              <a:defRPr/>
+            </a:pPr>
+            <a:r>
+              <a:rPr lang="en-US" sz="1200" dirty="0" err="1">
+                <a:solidFill>
+                  <a:srgbClr val="980000"/>
+                </a:solidFill>
+                <a:latin typeface="Arial MT"/>
+                <a:cs typeface="Arial MT"/>
+              </a:rPr>
+              <a:t>ps</a:t>
+            </a:r>
+            <a:r>
+              <a:rPr lang="en-US" sz="1200" spc="-10" dirty="0">
+                <a:solidFill>
+                  <a:srgbClr val="980000"/>
+                </a:solidFill>
+                <a:latin typeface="Arial MT"/>
+                <a:cs typeface="Arial MT"/>
+              </a:rPr>
+              <a:t> </a:t>
+            </a:r>
+            <a:r>
+              <a:rPr lang="en-US" sz="1200" dirty="0">
+                <a:solidFill>
+                  <a:srgbClr val="980000"/>
+                </a:solidFill>
+                <a:latin typeface="Arial MT"/>
+                <a:cs typeface="Arial MT"/>
+              </a:rPr>
+              <a:t>aux</a:t>
+            </a:r>
+            <a:r>
+              <a:rPr lang="en-US" sz="1200" spc="-10" dirty="0">
+                <a:solidFill>
+                  <a:srgbClr val="980000"/>
+                </a:solidFill>
+                <a:latin typeface="Arial MT"/>
+                <a:cs typeface="Arial MT"/>
+              </a:rPr>
+              <a:t> </a:t>
+            </a:r>
+            <a:r>
+              <a:rPr lang="en-US" sz="1200" dirty="0">
+                <a:solidFill>
+                  <a:srgbClr val="980000"/>
+                </a:solidFill>
+                <a:latin typeface="Arial MT"/>
+                <a:cs typeface="Arial MT"/>
+              </a:rPr>
+              <a:t>|</a:t>
+            </a:r>
+            <a:r>
+              <a:rPr lang="en-US" sz="1200" spc="-5" dirty="0">
+                <a:solidFill>
+                  <a:srgbClr val="980000"/>
+                </a:solidFill>
+                <a:latin typeface="Arial MT"/>
+                <a:cs typeface="Arial MT"/>
+              </a:rPr>
+              <a:t> </a:t>
+            </a:r>
+            <a:r>
+              <a:rPr lang="en-US" sz="1200" dirty="0">
+                <a:solidFill>
+                  <a:srgbClr val="980000"/>
+                </a:solidFill>
+                <a:latin typeface="Arial MT"/>
+                <a:cs typeface="Arial MT"/>
+              </a:rPr>
+              <a:t>grep</a:t>
+            </a:r>
+            <a:r>
+              <a:rPr lang="en-US" sz="1200" spc="-10" dirty="0">
+                <a:solidFill>
+                  <a:srgbClr val="980000"/>
+                </a:solidFill>
+                <a:latin typeface="Arial MT"/>
+                <a:cs typeface="Arial MT"/>
+              </a:rPr>
+              <a:t> </a:t>
+            </a:r>
+            <a:r>
+              <a:rPr lang="en-US" sz="1200" b="0" dirty="0">
+                <a:solidFill>
+                  <a:srgbClr val="A00C30"/>
+                </a:solidFill>
+                <a:latin typeface="Arial"/>
+                <a:cs typeface="Arial"/>
+              </a:rPr>
+              <a:t>relocation_example2</a:t>
+            </a:r>
+            <a:r>
+              <a:rPr lang="en-US" sz="1200" b="0" spc="-50" dirty="0">
+                <a:solidFill>
+                  <a:srgbClr val="A00C30"/>
+                </a:solidFill>
+                <a:latin typeface="Arial"/>
+                <a:cs typeface="Arial"/>
+              </a:rPr>
+              <a:t> </a:t>
+            </a:r>
+            <a:endParaRPr lang="en-US" sz="1200" b="0" dirty="0">
+              <a:latin typeface="Arial MT"/>
+              <a:cs typeface="Arial MT"/>
+            </a:endParaRPr>
+          </a:p>
+          <a:p>
+            <a:endParaRPr lang="en-US" sz="1200" b="1" kern="1200" dirty="0">
+              <a:solidFill>
+                <a:schemeClr val="tx1"/>
+              </a:solidFill>
+              <a:latin typeface="+mn-lt"/>
+              <a:ea typeface="+mn-ea"/>
+              <a:cs typeface="+mn-cs"/>
+            </a:endParaRPr>
+          </a:p>
+          <a:p>
+            <a:r>
+              <a:rPr lang="en-US" sz="1200" b="1" kern="1200" dirty="0" err="1">
+                <a:solidFill>
+                  <a:schemeClr val="tx1"/>
+                </a:solidFill>
+                <a:latin typeface="+mn-lt"/>
+                <a:ea typeface="+mn-ea"/>
+                <a:cs typeface="+mn-cs"/>
+              </a:rPr>
+              <a:t>vmmap</a:t>
+            </a:r>
+            <a:r>
+              <a:rPr lang="en-US" dirty="0"/>
+              <a:t>: </a:t>
+            </a:r>
+          </a:p>
+          <a:p>
+            <a:r>
+              <a:rPr lang="en-US" dirty="0"/>
+              <a:t>Provides detailed memory layout for a process.</a:t>
+            </a:r>
+          </a:p>
+          <a:p>
+            <a:r>
+              <a:rPr lang="en-US" dirty="0"/>
+              <a:t>MacOS: </a:t>
+            </a:r>
+            <a:r>
+              <a:rPr lang="en-US" dirty="0" err="1"/>
+              <a:t>vmmap</a:t>
+            </a:r>
+            <a:r>
+              <a:rPr lang="en-US" dirty="0"/>
+              <a:t> &lt;PID&gt;</a:t>
+            </a:r>
+          </a:p>
+          <a:p>
+            <a:r>
+              <a:rPr lang="en-US" b="0" dirty="0"/>
+              <a:t>Linux: </a:t>
+            </a:r>
+            <a:r>
+              <a:rPr lang="en-US" b="0" dirty="0" err="1"/>
+              <a:t>pmap</a:t>
+            </a:r>
+            <a:r>
+              <a:rPr lang="en-US" b="0"/>
+              <a:t> (</a:t>
+            </a:r>
+            <a:r>
+              <a:rPr lang="en-US" b="0" dirty="0"/>
+              <a:t>not an equivalent)</a:t>
+            </a:r>
+          </a:p>
+          <a:p>
+            <a:endParaRPr lang="en-US" dirty="0"/>
+          </a:p>
+        </p:txBody>
+      </p:sp>
+      <p:sp>
+        <p:nvSpPr>
+          <p:cNvPr id="4" name="Slide Number Placeholder 3"/>
+          <p:cNvSpPr>
+            <a:spLocks noGrp="1"/>
+          </p:cNvSpPr>
+          <p:nvPr>
+            <p:ph type="sldNum" sz="quarter" idx="5"/>
+          </p:nvPr>
+        </p:nvSpPr>
+        <p:spPr/>
+        <p:txBody>
+          <a:bodyPr/>
+          <a:lstStyle/>
+          <a:p>
+            <a:fld id="{3C11C18F-566C-4A85-8022-99BE34D7F2A5}" type="slidenum">
+              <a:rPr lang="en-US" smtClean="0"/>
+              <a:t>29</a:t>
+            </a:fld>
+            <a:endParaRPr lang="en-US"/>
+          </a:p>
+        </p:txBody>
+      </p:sp>
+    </p:spTree>
+    <p:extLst>
+      <p:ext uri="{BB962C8B-B14F-4D97-AF65-F5344CB8AC3E}">
+        <p14:creationId xmlns:p14="http://schemas.microsoft.com/office/powerpoint/2010/main" val="2968185692"/>
+      </p:ext>
+    </p:extLst>
+  </p:cSld>
+  <p:clrMapOvr>
+    <a:masterClrMapping/>
+  </p:clrMapOvr>
+</p:notes>
+</file>
+
+<file path=ppt/notesSlides/notesSlide22.xml><?xml version="1.0" encoding="utf-8"?>
+<p:notes xmlns:a="http://schemas.openxmlformats.org/drawingml/2006/main" xmlns:r="http://schemas.openxmlformats.org/officeDocument/2006/relationships" xmlns:p="http://schemas.openxmlformats.org/presentationml/2006/main">
+  <p:cSld>
+    <p:spTree>
+      <p:nvGrpSpPr>
+        <p:cNvPr id="1" name=""/>
+        <p:cNvGrpSpPr/>
+        <p:nvPr/>
+      </p:nvGrpSpPr>
+      <p:grpSpPr>
+        <a:xfrm>
+          <a:off x="0" y="0"/>
+          <a:ext cx="0" cy="0"/>
+          <a:chOff x="0" y="0"/>
+          <a:chExt cx="0" cy="0"/>
+        </a:xfrm>
+      </p:grpSpPr>
+      <p:sp>
+        <p:nvSpPr>
+          <p:cNvPr id="2" name="Slide Image Placeholder 1"/>
+          <p:cNvSpPr>
+            <a:spLocks noGrp="1" noRot="1" noChangeAspect="1"/>
+          </p:cNvSpPr>
+          <p:nvPr>
+            <p:ph type="sldImg"/>
+          </p:nvPr>
+        </p:nvSpPr>
+        <p:spPr/>
+      </p:sp>
+      <p:sp>
+        <p:nvSpPr>
+          <p:cNvPr id="3" name="Notes Placeholder 2"/>
+          <p:cNvSpPr>
+            <a:spLocks noGrp="1"/>
+          </p:cNvSpPr>
+          <p:nvPr>
+            <p:ph type="body" idx="1"/>
+          </p:nvPr>
+        </p:nvSpPr>
+        <p:spPr/>
+        <p:txBody>
+          <a:bodyPr/>
+          <a:lstStyle/>
+          <a:p>
+            <a:pPr marL="0" marR="0" lvl="0" indent="0" algn="l" defTabSz="914400" rtl="0" eaLnBrk="1" fontAlgn="auto" latinLnBrk="0" hangingPunct="1">
+              <a:lnSpc>
+                <a:spcPct val="100000"/>
+              </a:lnSpc>
+              <a:spcBef>
+                <a:spcPts val="0"/>
+              </a:spcBef>
+              <a:spcAft>
+                <a:spcPts val="0"/>
+              </a:spcAft>
+              <a:buClrTx/>
+              <a:buSzTx/>
+              <a:buFontTx/>
+              <a:buNone/>
+              <a:tabLst/>
+              <a:defRPr/>
+            </a:pPr>
+            <a:r>
+              <a:rPr lang="en-US" b="1" dirty="0"/>
+              <a:t>Resident Size (RSS)</a:t>
+            </a:r>
+            <a:r>
+              <a:rPr lang="en-US" dirty="0"/>
+              <a:t>: Memory actually in RAM.</a:t>
+            </a:r>
+          </a:p>
+          <a:p>
+            <a:endParaRPr lang="en-US" dirty="0"/>
+          </a:p>
+        </p:txBody>
+      </p:sp>
+      <p:sp>
+        <p:nvSpPr>
+          <p:cNvPr id="4" name="Slide Number Placeholder 3"/>
+          <p:cNvSpPr>
+            <a:spLocks noGrp="1"/>
+          </p:cNvSpPr>
+          <p:nvPr>
+            <p:ph type="sldNum" sz="quarter" idx="5"/>
+          </p:nvPr>
+        </p:nvSpPr>
+        <p:spPr/>
+        <p:txBody>
+          <a:bodyPr/>
+          <a:lstStyle/>
+          <a:p>
+            <a:fld id="{3C11C18F-566C-4A85-8022-99BE34D7F2A5}" type="slidenum">
+              <a:rPr lang="en-US" smtClean="0"/>
+              <a:t>31</a:t>
+            </a:fld>
+            <a:endParaRPr lang="en-US"/>
+          </a:p>
+        </p:txBody>
+      </p:sp>
+    </p:spTree>
+    <p:extLst>
+      <p:ext uri="{BB962C8B-B14F-4D97-AF65-F5344CB8AC3E}">
+        <p14:creationId xmlns:p14="http://schemas.microsoft.com/office/powerpoint/2010/main" val="1974297098"/>
+      </p:ext>
+    </p:extLst>
+  </p:cSld>
+  <p:clrMapOvr>
+    <a:masterClrMapping/>
+  </p:clrMapOvr>
+</p:notes>
+</file>
+
+<file path=ppt/notesSlides/notesSlide23.xml><?xml version="1.0" encoding="utf-8"?>
+<p:notes xmlns:a="http://schemas.openxmlformats.org/drawingml/2006/main" xmlns:r="http://schemas.openxmlformats.org/officeDocument/2006/relationships" xmlns:p="http://schemas.openxmlformats.org/presentationml/2006/main">
+  <p:cSld>
+    <p:spTree>
+      <p:nvGrpSpPr>
+        <p:cNvPr id="1" name=""/>
+        <p:cNvGrpSpPr/>
+        <p:nvPr/>
+      </p:nvGrpSpPr>
+      <p:grpSpPr>
+        <a:xfrm>
+          <a:off x="0" y="0"/>
+          <a:ext cx="0" cy="0"/>
+          <a:chOff x="0" y="0"/>
+          <a:chExt cx="0" cy="0"/>
+        </a:xfrm>
+      </p:grpSpPr>
+      <p:sp>
+        <p:nvSpPr>
+          <p:cNvPr id="2" name="Slide Image Placeholder 1"/>
+          <p:cNvSpPr>
+            <a:spLocks noGrp="1" noRot="1" noChangeAspect="1"/>
+          </p:cNvSpPr>
+          <p:nvPr>
+            <p:ph type="sldImg"/>
+          </p:nvPr>
+        </p:nvSpPr>
+        <p:spPr/>
+      </p:sp>
+      <p:sp>
+        <p:nvSpPr>
+          <p:cNvPr id="3" name="Notes Placeholder 2"/>
+          <p:cNvSpPr>
+            <a:spLocks noGrp="1"/>
+          </p:cNvSpPr>
+          <p:nvPr>
+            <p:ph type="body" idx="1"/>
+          </p:nvPr>
+        </p:nvSpPr>
+        <p:spPr/>
+        <p:txBody>
+          <a:bodyPr/>
+          <a:lstStyle/>
+          <a:p>
+            <a:r>
+              <a:rPr lang="en-US" b="1" dirty="0"/>
+              <a:t>Dirty Size</a:t>
+            </a:r>
+            <a:r>
+              <a:rPr lang="en-US" dirty="0"/>
+              <a:t>: Modified memory not backed by a file.</a:t>
+            </a:r>
+          </a:p>
+          <a:p>
+            <a:endParaRPr lang="en-US" dirty="0"/>
+          </a:p>
+        </p:txBody>
+      </p:sp>
+      <p:sp>
+        <p:nvSpPr>
+          <p:cNvPr id="4" name="Slide Number Placeholder 3"/>
+          <p:cNvSpPr>
+            <a:spLocks noGrp="1"/>
+          </p:cNvSpPr>
+          <p:nvPr>
+            <p:ph type="sldNum" sz="quarter" idx="5"/>
+          </p:nvPr>
+        </p:nvSpPr>
+        <p:spPr/>
+        <p:txBody>
+          <a:bodyPr/>
+          <a:lstStyle/>
+          <a:p>
+            <a:fld id="{3C11C18F-566C-4A85-8022-99BE34D7F2A5}" type="slidenum">
+              <a:rPr lang="en-US" smtClean="0"/>
+              <a:t>32</a:t>
+            </a:fld>
+            <a:endParaRPr lang="en-US"/>
+          </a:p>
+        </p:txBody>
+      </p:sp>
+    </p:spTree>
+    <p:extLst>
+      <p:ext uri="{BB962C8B-B14F-4D97-AF65-F5344CB8AC3E}">
+        <p14:creationId xmlns:p14="http://schemas.microsoft.com/office/powerpoint/2010/main" val="440136998"/>
+      </p:ext>
+    </p:extLst>
+  </p:cSld>
+  <p:clrMapOvr>
+    <a:masterClrMapping/>
+  </p:clrMapOvr>
+</p:notes>
+</file>
+
+<file path=ppt/notesSlides/notesSlide24.xml><?xml version="1.0" encoding="utf-8"?>
+<p:notes xmlns:a="http://schemas.openxmlformats.org/drawingml/2006/main" xmlns:r="http://schemas.openxmlformats.org/officeDocument/2006/relationships" xmlns:p="http://schemas.openxmlformats.org/presentationml/2006/main">
+  <p:cSld>
+    <p:spTree>
+      <p:nvGrpSpPr>
+        <p:cNvPr id="1" name=""/>
+        <p:cNvGrpSpPr/>
+        <p:nvPr/>
+      </p:nvGrpSpPr>
+      <p:grpSpPr>
+        <a:xfrm>
+          <a:off x="0" y="0"/>
+          <a:ext cx="0" cy="0"/>
+          <a:chOff x="0" y="0"/>
+          <a:chExt cx="0" cy="0"/>
+        </a:xfrm>
+      </p:grpSpPr>
+      <p:sp>
+        <p:nvSpPr>
+          <p:cNvPr id="2" name="Slide Image Placeholder 1"/>
+          <p:cNvSpPr>
+            <a:spLocks noGrp="1" noRot="1" noChangeAspect="1"/>
+          </p:cNvSpPr>
+          <p:nvPr>
+            <p:ph type="sldImg"/>
+          </p:nvPr>
+        </p:nvSpPr>
+        <p:spPr/>
+      </p:sp>
+      <p:sp>
+        <p:nvSpPr>
+          <p:cNvPr id="3" name="Notes Placeholder 2"/>
+          <p:cNvSpPr>
+            <a:spLocks noGrp="1"/>
+          </p:cNvSpPr>
+          <p:nvPr>
+            <p:ph type="body" idx="1"/>
+          </p:nvPr>
+        </p:nvSpPr>
+        <p:spPr/>
+        <p:txBody>
+          <a:bodyPr/>
+          <a:lstStyle/>
+          <a:p>
             <a:endParaRPr lang="en-US" dirty="0"/>
           </a:p>
         </p:txBody>
@@ -1991,7 +3084,7 @@
 </p:notes>
 </file>
 
-<file path=ppt/notesSlides/notesSlide21.xml><?xml version="1.0" encoding="utf-8"?>
+<file path=ppt/notesSlides/notesSlide25.xml><?xml version="1.0" encoding="utf-8"?>
 <p:notes xmlns:a="http://schemas.openxmlformats.org/drawingml/2006/main" xmlns:r="http://schemas.openxmlformats.org/officeDocument/2006/relationships" xmlns:p="http://schemas.openxmlformats.org/presentationml/2006/main">
   <p:cSld>
     <p:spTree>
@@ -2075,7 +3168,7 @@
 </p:notes>
 </file>
 
-<file path=ppt/notesSlides/notesSlide22.xml><?xml version="1.0" encoding="utf-8"?>
+<file path=ppt/notesSlides/notesSlide26.xml><?xml version="1.0" encoding="utf-8"?>
 <p:notes xmlns:a="http://schemas.openxmlformats.org/drawingml/2006/main" xmlns:r="http://schemas.openxmlformats.org/officeDocument/2006/relationships" xmlns:p="http://schemas.openxmlformats.org/presentationml/2006/main">
   <p:cSld>
     <p:spTree>
@@ -2232,84 +3325,6 @@
           <a:p>
             <a:r>
               <a:rPr lang="en-US" b="1" dirty="0"/>
-              <a:t>Compilation</a:t>
-            </a:r>
-            <a:r>
-              <a:rPr lang="en-US" dirty="0"/>
-              <a:t>: </a:t>
-            </a:r>
-          </a:p>
-          <a:p>
-            <a:r>
-              <a:rPr lang="en-US" dirty="0"/>
-              <a:t>Use </a:t>
-            </a:r>
-            <a:r>
-              <a:rPr lang="en-US" sz="1200" kern="1200" dirty="0" err="1">
-                <a:solidFill>
-                  <a:schemeClr val="tx1"/>
-                </a:solidFill>
-                <a:latin typeface="+mn-lt"/>
-                <a:ea typeface="+mn-ea"/>
-                <a:cs typeface="+mn-cs"/>
-              </a:rPr>
-              <a:t>gcc</a:t>
-            </a:r>
-            <a:r>
-              <a:rPr lang="en-US" sz="1200" kern="1200" dirty="0">
-                <a:solidFill>
-                  <a:schemeClr val="tx1"/>
-                </a:solidFill>
-                <a:latin typeface="+mn-lt"/>
-                <a:ea typeface="+mn-ea"/>
-                <a:cs typeface="+mn-cs"/>
-              </a:rPr>
-              <a:t> -c </a:t>
-            </a:r>
-            <a:r>
-              <a:rPr lang="en-US" sz="1200" kern="1200" dirty="0" err="1">
-                <a:solidFill>
-                  <a:schemeClr val="tx1"/>
-                </a:solidFill>
-                <a:latin typeface="+mn-lt"/>
-                <a:ea typeface="+mn-ea"/>
-                <a:cs typeface="+mn-cs"/>
-              </a:rPr>
-              <a:t>math_operations.c</a:t>
-            </a:r>
-            <a:r>
-              <a:rPr lang="en-US" sz="1200" kern="1200" dirty="0">
-                <a:solidFill>
-                  <a:schemeClr val="tx1"/>
-                </a:solidFill>
-                <a:latin typeface="+mn-lt"/>
-                <a:ea typeface="+mn-ea"/>
-                <a:cs typeface="+mn-cs"/>
-              </a:rPr>
-              <a:t> </a:t>
-            </a:r>
-            <a:r>
-              <a:rPr lang="en-US" sz="1200" kern="1200" dirty="0" err="1">
-                <a:solidFill>
-                  <a:schemeClr val="tx1"/>
-                </a:solidFill>
-                <a:latin typeface="+mn-lt"/>
-                <a:ea typeface="+mn-ea"/>
-                <a:cs typeface="+mn-cs"/>
-              </a:rPr>
-              <a:t>string_operations.c</a:t>
-            </a:r>
-            <a:r>
-              <a:rPr lang="en-US" dirty="0"/>
-              <a:t> to create object files.</a:t>
-            </a:r>
-          </a:p>
-          <a:p>
-            <a:endParaRPr lang="en-US" dirty="0"/>
-          </a:p>
-          <a:p>
-            <a:r>
-              <a:rPr lang="en-US" b="1" dirty="0"/>
               <a:t>Archiving</a:t>
             </a:r>
             <a:r>
@@ -2579,6 +3594,8 @@
               <a:rPr lang="en-US" dirty="0"/>
               <a:t>Link the library to a program using </a:t>
             </a:r>
+          </a:p>
+          <a:p>
             <a:r>
               <a:rPr lang="en-US" sz="1200" kern="1200" dirty="0" err="1">
                 <a:solidFill>
@@ -2811,132 +3828,17 @@
           <a:p>
             <a:r>
               <a:rPr lang="en-US" b="1" dirty="0"/>
-              <a:t>Relocation Techniques</a:t>
+              <a:t>Note:</a:t>
             </a:r>
           </a:p>
           <a:p>
-            <a:endParaRPr lang="en-US" b="1" dirty="0"/>
-          </a:p>
-          <a:p>
-            <a:r>
-              <a:rPr lang="en-US" b="1" dirty="0"/>
-              <a:t>Static Relocation</a:t>
+            <a:r>
+              <a:rPr lang="en-US" b="1" dirty="0" err="1"/>
+              <a:t>ldd</a:t>
             </a:r>
             <a:r>
               <a:rPr lang="en-US" dirty="0"/>
-              <a:t>:</a:t>
-            </a:r>
-          </a:p>
-          <a:p>
-            <a:pPr marL="171450" indent="-171450">
-              <a:buFont typeface="Arial" panose="020B0604020202020204" pitchFamily="34" charset="0"/>
-              <a:buChar char="•"/>
-            </a:pPr>
-            <a:r>
-              <a:rPr lang="en-US" dirty="0"/>
-              <a:t>Linker (</a:t>
-            </a:r>
-            <a:r>
-              <a:rPr lang="en-US" sz="1200" kern="1200" dirty="0" err="1">
-                <a:solidFill>
-                  <a:schemeClr val="tx1"/>
-                </a:solidFill>
-                <a:latin typeface="+mn-lt"/>
-                <a:ea typeface="+mn-ea"/>
-                <a:cs typeface="+mn-cs"/>
-              </a:rPr>
-              <a:t>ld</a:t>
-            </a:r>
-            <a:r>
-              <a:rPr lang="en-US" dirty="0"/>
-              <a:t>) resolves absolute addresses at compile-time and merges object files.</a:t>
-            </a:r>
-          </a:p>
-          <a:p>
-            <a:pPr marL="171450" indent="-171450">
-              <a:buFont typeface="Arial" panose="020B0604020202020204" pitchFamily="34" charset="0"/>
-              <a:buChar char="•"/>
-            </a:pPr>
-            <a:r>
-              <a:rPr lang="en-US" dirty="0"/>
-              <a:t>The final binary contains fixed memory addresses and has no external shared library dependencies.</a:t>
-            </a:r>
-          </a:p>
-          <a:p>
-            <a:pPr marL="0" indent="0">
-              <a:buFont typeface="Arial" panose="020B0604020202020204" pitchFamily="34" charset="0"/>
-              <a:buNone/>
-            </a:pPr>
-            <a:endParaRPr lang="en-US" dirty="0"/>
-          </a:p>
-          <a:p>
-            <a:r>
-              <a:rPr lang="en-US" b="1" dirty="0"/>
-              <a:t>Dynamic Relocation</a:t>
-            </a:r>
-            <a:r>
-              <a:rPr lang="en-US" dirty="0"/>
-              <a:t>:</a:t>
-            </a:r>
-          </a:p>
-          <a:p>
-            <a:pPr marL="171450" indent="-171450">
-              <a:buFont typeface="Arial" panose="020B0604020202020204" pitchFamily="34" charset="0"/>
-              <a:buChar char="•"/>
-            </a:pPr>
-            <a:r>
-              <a:rPr lang="en-US" dirty="0"/>
-              <a:t>The executable contains "placeholders" (relocation entries).</a:t>
-            </a:r>
-          </a:p>
-          <a:p>
-            <a:pPr marL="171450" indent="-171450">
-              <a:buFont typeface="Arial" panose="020B0604020202020204" pitchFamily="34" charset="0"/>
-              <a:buChar char="•"/>
-            </a:pPr>
-            <a:r>
-              <a:rPr lang="en-US" dirty="0"/>
-              <a:t>The dynamic linker (</a:t>
-            </a:r>
-            <a:r>
-              <a:rPr lang="en-US" sz="1200" kern="1200" dirty="0">
-                <a:solidFill>
-                  <a:schemeClr val="tx1"/>
-                </a:solidFill>
-                <a:latin typeface="+mn-lt"/>
-                <a:ea typeface="+mn-ea"/>
-                <a:cs typeface="+mn-cs"/>
-              </a:rPr>
-              <a:t>ld.so</a:t>
-            </a:r>
-            <a:r>
-              <a:rPr lang="en-US" dirty="0"/>
-              <a:t>) resolves these at runtime when shared libraries (</a:t>
-            </a:r>
-            <a:r>
-              <a:rPr lang="en-US" sz="1200" kern="1200" dirty="0">
-                <a:solidFill>
-                  <a:schemeClr val="tx1"/>
-                </a:solidFill>
-                <a:latin typeface="+mn-lt"/>
-                <a:ea typeface="+mn-ea"/>
-                <a:cs typeface="+mn-cs"/>
-              </a:rPr>
-              <a:t>.so</a:t>
-            </a:r>
-            <a:r>
-              <a:rPr lang="en-US" dirty="0"/>
-              <a:t>) are loaded.</a:t>
-            </a:r>
-          </a:p>
-          <a:p>
-            <a:pPr marL="171450" indent="-171450">
-              <a:buFont typeface="Arial" panose="020B0604020202020204" pitchFamily="34" charset="0"/>
-              <a:buChar char="•"/>
-            </a:pPr>
-            <a:r>
-              <a:rPr lang="en-US" dirty="0"/>
-              <a:t>Allows libraries to be updated without recompiling the main program.</a:t>
+              <a:t> only checks for dynamically linked libraries.</a:t>
             </a:r>
           </a:p>
           <a:p>
@@ -2961,7 +3863,7 @@
           <a:p>
             <a:fld id="{3C11C18F-566C-4A85-8022-99BE34D7F2A5}" type="slidenum">
               <a:rPr lang="en-US" smtClean="0"/>
-              <a:t>9</a:t>
+              <a:t>8</a:t>
             </a:fld>
             <a:endParaRPr lang="en-US"/>
           </a:p>
@@ -2970,7 +3872,7 @@
     </p:spTree>
     <p:extLst>
       <p:ext uri="{BB962C8B-B14F-4D97-AF65-F5344CB8AC3E}">
-        <p14:creationId xmlns:p14="http://schemas.microsoft.com/office/powerpoint/2010/main" val="1222409666"/>
+        <p14:creationId xmlns:p14="http://schemas.microsoft.com/office/powerpoint/2010/main" val="3638092780"/>
       </p:ext>
     </p:extLst>
   </p:cSld>
@@ -3025,39 +3927,104 @@
           <a:lstStyle/>
           <a:p>
             <a:r>
-              <a:rPr lang="en-US" b="1" u="sng" dirty="0"/>
-              <a:t>See example:</a:t>
+              <a:rPr lang="en-US" b="1" dirty="0"/>
+              <a:t>Relocation Techniques</a:t>
             </a:r>
           </a:p>
           <a:p>
-            <a:r>
-              <a:rPr lang="en-US" dirty="0"/>
-              <a:t>Symbol Table Entry directory</a:t>
-            </a:r>
+            <a:endParaRPr lang="en-US" b="1" dirty="0"/>
           </a:p>
           <a:p>
+            <a:r>
+              <a:rPr lang="en-US" b="1" dirty="0"/>
+              <a:t>Static Relocation</a:t>
+            </a:r>
+            <a:r>
+              <a:rPr lang="en-US" dirty="0"/>
+              <a:t>:</a:t>
+            </a:r>
+          </a:p>
+          <a:p>
+            <a:pPr marL="171450" indent="-171450">
+              <a:buFont typeface="Arial" panose="020B0604020202020204" pitchFamily="34" charset="0"/>
+              <a:buChar char="•"/>
+            </a:pPr>
+            <a:r>
+              <a:rPr lang="en-US" dirty="0"/>
+              <a:t>Linker (</a:t>
+            </a:r>
+            <a:r>
+              <a:rPr lang="en-US" sz="1200" kern="1200" dirty="0" err="1">
+                <a:solidFill>
+                  <a:schemeClr val="tx1"/>
+                </a:solidFill>
+                <a:latin typeface="+mn-lt"/>
+                <a:ea typeface="+mn-ea"/>
+                <a:cs typeface="+mn-cs"/>
+              </a:rPr>
+              <a:t>ld</a:t>
+            </a:r>
+            <a:r>
+              <a:rPr lang="en-US" dirty="0"/>
+              <a:t>) resolves absolute addresses at compile-time and merges object files.</a:t>
+            </a:r>
+          </a:p>
+          <a:p>
+            <a:pPr marL="171450" indent="-171450">
+              <a:buFont typeface="Arial" panose="020B0604020202020204" pitchFamily="34" charset="0"/>
+              <a:buChar char="•"/>
+            </a:pPr>
+            <a:r>
+              <a:rPr lang="en-US" dirty="0"/>
+              <a:t>The final binary contains fixed memory addresses and has no external shared library dependencies.</a:t>
+            </a:r>
+          </a:p>
+          <a:p>
+            <a:pPr marL="0" indent="0">
+              <a:buFont typeface="Arial" panose="020B0604020202020204" pitchFamily="34" charset="0"/>
+              <a:buNone/>
+            </a:pPr>
             <a:endParaRPr lang="en-US" dirty="0"/>
           </a:p>
           <a:p>
             <a:r>
+              <a:rPr lang="en-US" b="1" dirty="0"/>
+              <a:t>Dynamic Relocation</a:t>
+            </a:r>
+            <a:r>
               <a:rPr lang="en-US" dirty="0"/>
-              <a:t>A terminal output showing a Mach-O arm64 symbol table for an object file, with a red box highlighting the _</a:t>
-            </a:r>
-            <a:r>
-              <a:rPr lang="en-US" dirty="0" err="1"/>
-              <a:t>print_message</a:t>
-            </a:r>
-            <a:r>
-              <a:rPr lang="en-US" dirty="0"/>
-              <a:t> symbol at address zero.</a:t>
+              <a:t>:</a:t>
             </a:r>
           </a:p>
           <a:p>
-            <a:endParaRPr lang="en-US" dirty="0"/>
+            <a:pPr marL="171450" indent="-171450">
+              <a:buFont typeface="Arial" panose="020B0604020202020204" pitchFamily="34" charset="0"/>
+              <a:buChar char="•"/>
+            </a:pPr>
+            <a:r>
+              <a:rPr lang="en-US" dirty="0"/>
+              <a:t>The executable contains "</a:t>
+            </a:r>
+            <a:r>
+              <a:rPr lang="en-US" b="1" dirty="0"/>
+              <a:t>placeholders</a:t>
+            </a:r>
+            <a:r>
+              <a:rPr lang="en-US" dirty="0"/>
+              <a:t>" (relocation entries).</a:t>
+            </a:r>
           </a:p>
           <a:p>
-            <a:r>
-              <a:rPr lang="en-US" sz="1200" b="1" kern="1200" dirty="0" err="1">
+            <a:pPr marL="171450" indent="-171450">
+              <a:buFont typeface="Arial" panose="020B0604020202020204" pitchFamily="34" charset="0"/>
+              <a:buChar char="•"/>
+            </a:pPr>
+            <a:r>
+              <a:rPr lang="en-US" dirty="0"/>
+              <a:t>The dynamic linker (</a:t>
+            </a:r>
+            <a:r>
+              <a:rPr lang="en-US" sz="1200" kern="1200" dirty="0">
                 <a:solidFill>
                   <a:schemeClr val="tx1"/>
                 </a:solidFill>
@@ -3065,17 +4032,11 @@
                 <a:ea typeface="+mn-ea"/>
                 <a:cs typeface="+mn-cs"/>
               </a:rPr>
-              <a:t>objdump</a:t>
+              <a:t>ld.so</a:t>
             </a:r>
             <a:r>
               <a:rPr lang="en-US" dirty="0"/>
-              <a:t>: </a:t>
-            </a:r>
-          </a:p>
-          <a:p>
-            <a:r>
-              <a:rPr lang="en-US" dirty="0"/>
-              <a:t>Used to inspect symbol tables (</a:t>
+              <a:t>) resolves these at runtime when shared libraries (</a:t>
             </a:r>
             <a:r>
               <a:rPr lang="en-US" sz="1200" kern="1200" dirty="0">
@@ -3086,26 +4047,21 @@
                 <a:ea typeface="+mn-ea"/>
                 <a:cs typeface="+mn-cs"/>
               </a:rPr>
-              <a:t>-t</a:t>
+              <a:t>.so</a:t>
             </a:r>
             <a:r>
               <a:rPr lang="en-US" dirty="0"/>
-              <a:t>) and relocation entries (</a:t>
-            </a:r>
-            <a:r>
-              <a:rPr lang="en-US" sz="1200" kern="1200" dirty="0">
-                <a:solidFill>
-                  <a:schemeClr val="tx1"/>
-                </a:solidFill>
-                <a:latin typeface="+mn-lt"/>
-                <a:ea typeface="+mn-ea"/>
-                <a:cs typeface="+mn-cs"/>
-              </a:rPr>
-              <a:t>-r</a:t>
-            </a:r>
+              <a:t>) are loaded.</a:t>
+            </a:r>
+          </a:p>
+          <a:p>
+            <a:pPr marL="171450" indent="-171450">
+              <a:buFont typeface="Arial" panose="020B0604020202020204" pitchFamily="34" charset="0"/>
+              <a:buChar char="•"/>
+            </a:pPr>
             <a:r>
               <a:rPr lang="en-US" dirty="0"/>
-              <a:t>).</a:t>
+              <a:t>Allows libraries to be updated without recompiling the main program.</a:t>
             </a:r>
           </a:p>
           <a:p>
@@ -3130,7 +4086,7 @@
           <a:p>
             <a:fld id="{3C11C18F-566C-4A85-8022-99BE34D7F2A5}" type="slidenum">
               <a:rPr lang="en-US" smtClean="0"/>
-              <a:t>11</a:t>
+              <a:t>9</a:t>
             </a:fld>
             <a:endParaRPr lang="en-US"/>
           </a:p>
@@ -3139,7 +4095,7 @@
     </p:spTree>
     <p:extLst>
       <p:ext uri="{BB962C8B-B14F-4D97-AF65-F5344CB8AC3E}">
-        <p14:creationId xmlns:p14="http://schemas.microsoft.com/office/powerpoint/2010/main" val="4166332713"/>
+        <p14:creationId xmlns:p14="http://schemas.microsoft.com/office/powerpoint/2010/main" val="1222409666"/>
       </p:ext>
     </p:extLst>
   </p:cSld>
@@ -3194,27 +4150,89 @@
           <a:lstStyle/>
           <a:p>
             <a:r>
-              <a:rPr lang="en-US" dirty="0"/>
-              <a:t>A terminal output listing relocation records for an object file, showing offsets and types like ARM64_RELOC_BRANCH26 for symbols such as _</a:t>
-            </a:r>
-            <a:r>
-              <a:rPr lang="en-US" dirty="0" err="1"/>
-              <a:t>print_message</a:t>
-            </a:r>
-            <a:r>
-              <a:rPr lang="en-US" dirty="0"/>
-              <a:t> and _</a:t>
-            </a:r>
-            <a:r>
-              <a:rPr lang="en-US" dirty="0" err="1"/>
-              <a:t>printf</a:t>
-            </a:r>
-            <a:r>
-              <a:rPr lang="en-US" dirty="0"/>
-              <a:t>.</a:t>
+              <a:rPr lang="en-US" b="1" dirty="0"/>
+              <a:t>Figure:</a:t>
             </a:r>
           </a:p>
           <a:p>
+            <a:r>
+              <a:rPr lang="en-US" dirty="0"/>
+              <a:t>A detailed technical diagram illustrating the phases of a compiler driver, </a:t>
+            </a:r>
+          </a:p>
+          <a:p>
+            <a:pPr marL="171450" indent="-171450">
+              <a:buFont typeface="Arial" panose="020B0604020202020204" pitchFamily="34" charset="0"/>
+              <a:buChar char="•"/>
+            </a:pPr>
+            <a:r>
+              <a:rPr lang="en-US" dirty="0"/>
+              <a:t>from source code (</a:t>
+            </a:r>
+            <a:r>
+              <a:rPr lang="en-US" dirty="0" err="1"/>
+              <a:t>prog.c</a:t>
+            </a:r>
+            <a:r>
+              <a:rPr lang="en-US" dirty="0"/>
+              <a:t>) </a:t>
+            </a:r>
+          </a:p>
+          <a:p>
+            <a:pPr marL="171450" indent="-171450">
+              <a:buFont typeface="Arial" panose="020B0604020202020204" pitchFamily="34" charset="0"/>
+              <a:buChar char="•"/>
+            </a:pPr>
+            <a:r>
+              <a:rPr lang="en-US" dirty="0"/>
+              <a:t>through preprocessing, </a:t>
+            </a:r>
+          </a:p>
+          <a:p>
+            <a:pPr marL="171450" indent="-171450">
+              <a:buFont typeface="Arial" panose="020B0604020202020204" pitchFamily="34" charset="0"/>
+              <a:buChar char="•"/>
+            </a:pPr>
+            <a:r>
+              <a:rPr lang="en-US" dirty="0"/>
+              <a:t>compilation, </a:t>
+            </a:r>
+          </a:p>
+          <a:p>
+            <a:pPr marL="171450" indent="-171450">
+              <a:buFont typeface="Arial" panose="020B0604020202020204" pitchFamily="34" charset="0"/>
+              <a:buChar char="•"/>
+            </a:pPr>
+            <a:r>
+              <a:rPr lang="en-US" dirty="0"/>
+              <a:t>assembly, </a:t>
+            </a:r>
+          </a:p>
+          <a:p>
+            <a:pPr marL="171450" indent="-171450">
+              <a:buFont typeface="Arial" panose="020B0604020202020204" pitchFamily="34" charset="0"/>
+              <a:buChar char="•"/>
+            </a:pPr>
+            <a:r>
+              <a:rPr lang="en-US" dirty="0"/>
+              <a:t>and linking to the final executable </a:t>
+            </a:r>
+          </a:p>
+          <a:p>
+            <a:pPr marL="171450" indent="-171450">
+              <a:buFont typeface="Arial" panose="020B0604020202020204" pitchFamily="34" charset="0"/>
+              <a:buChar char="•"/>
+            </a:pPr>
+            <a:r>
+              <a:rPr lang="en-US" dirty="0"/>
+              <a:t>and process.</a:t>
+            </a:r>
+          </a:p>
+          <a:p>
+            <a:pPr marL="0" indent="0">
+              <a:buFont typeface="Arial" panose="020B0604020202020204" pitchFamily="34" charset="0"/>
+              <a:buNone/>
+            </a:pPr>
             <a:endParaRPr lang="en-US" dirty="0"/>
           </a:p>
         </p:txBody>
@@ -3236,7 +4254,7 @@
           <a:p>
             <a:fld id="{3C11C18F-566C-4A85-8022-99BE34D7F2A5}" type="slidenum">
               <a:rPr lang="en-US" smtClean="0"/>
-              <a:t>12</a:t>
+              <a:t>10</a:t>
             </a:fld>
             <a:endParaRPr lang="en-US"/>
           </a:p>
@@ -3245,7 +4263,7 @@
     </p:spTree>
     <p:extLst>
       <p:ext uri="{BB962C8B-B14F-4D97-AF65-F5344CB8AC3E}">
-        <p14:creationId xmlns:p14="http://schemas.microsoft.com/office/powerpoint/2010/main" val="3375502043"/>
+        <p14:creationId xmlns:p14="http://schemas.microsoft.com/office/powerpoint/2010/main" val="1958323580"/>
       </p:ext>
     </p:extLst>
   </p:cSld>
@@ -3300,11 +4318,51 @@
           <a:lstStyle/>
           <a:p>
             <a:r>
+              <a:rPr lang="en-US" b="1" u="sng" dirty="0"/>
+              <a:t>See example:</a:t>
+            </a:r>
+          </a:p>
+          <a:p>
+            <a:r>
               <a:rPr lang="en-US" dirty="0"/>
-              <a:t>A terminal output of a symbol table for a linked executable where </a:t>
-            </a:r>
-            <a:r>
-              <a:rPr lang="en-US" sz="1200" kern="1200" dirty="0">
+              <a:t>Symbol Table Entry directory</a:t>
+            </a:r>
+          </a:p>
+          <a:p>
+            <a:endParaRPr lang="en-US" dirty="0"/>
+          </a:p>
+          <a:p>
+            <a:r>
+              <a:rPr lang="en-US" b="1" dirty="0"/>
+              <a:t>Figure:</a:t>
+            </a:r>
+          </a:p>
+          <a:p>
+            <a:r>
+              <a:rPr lang="en-US" dirty="0"/>
+              <a:t>A terminal output showing a Mach-O arm64 symbol table for an object file, </a:t>
+            </a:r>
+          </a:p>
+          <a:p>
+            <a:r>
+              <a:rPr lang="en-US" dirty="0"/>
+              <a:t>with a red box highlighting the _</a:t>
+            </a:r>
+            <a:r>
+              <a:rPr lang="en-US" dirty="0" err="1"/>
+              <a:t>print_message</a:t>
+            </a:r>
+            <a:r>
+              <a:rPr lang="en-US" dirty="0"/>
+              <a:t> symbol at address zero.</a:t>
+            </a:r>
+          </a:p>
+          <a:p>
+            <a:endParaRPr lang="en-US" dirty="0"/>
+          </a:p>
+          <a:p>
+            <a:r>
+              <a:rPr lang="en-US" sz="1200" b="1" kern="1200" dirty="0" err="1">
                 <a:solidFill>
                   <a:schemeClr val="tx1"/>
                 </a:solidFill>
@@ -3312,10 +4370,20 @@
                 <a:ea typeface="+mn-ea"/>
                 <a:cs typeface="+mn-cs"/>
               </a:rPr>
-              <a:t>_</a:t>
-            </a:r>
-            <a:r>
-              <a:rPr lang="en-US" sz="1200" kern="1200" dirty="0" err="1">
+              <a:t>objdump</a:t>
+            </a:r>
+            <a:r>
+              <a:rPr lang="en-US" dirty="0"/>
+              <a:t>: </a:t>
+            </a:r>
+          </a:p>
+          <a:p>
+            <a:r>
+              <a:rPr lang="en-US" dirty="0"/>
+              <a:t>Used to inspect symbol tables (</a:t>
+            </a:r>
+            <a:r>
+              <a:rPr lang="en-US" sz="1200" kern="1200" dirty="0">
                 <a:solidFill>
                   <a:schemeClr val="tx1"/>
                 </a:solidFill>
@@ -3323,11 +4391,11 @@
                 <a:ea typeface="+mn-ea"/>
                 <a:cs typeface="+mn-cs"/>
               </a:rPr>
-              <a:t>print_message</a:t>
+              <a:t>-t</a:t>
             </a:r>
             <a:r>
               <a:rPr lang="en-US" dirty="0"/>
-              <a:t> now has a specific memory address and </a:t>
+              <a:t>) and relocation entries (</a:t>
             </a:r>
             <a:r>
               <a:rPr lang="en-US" sz="1200" kern="1200" dirty="0">
@@ -3338,33 +4406,7 @@
                 <a:ea typeface="+mn-ea"/>
                 <a:cs typeface="+mn-cs"/>
               </a:rPr>
-              <a:t>_</a:t>
-            </a:r>
-            <a:r>
-              <a:rPr lang="en-US" sz="1200" kern="1200" dirty="0" err="1">
-                <a:solidFill>
-                  <a:schemeClr val="tx1"/>
-                </a:solidFill>
-                <a:latin typeface="+mn-lt"/>
-                <a:ea typeface="+mn-ea"/>
-                <a:cs typeface="+mn-cs"/>
-              </a:rPr>
-              <a:t>printf</a:t>
-            </a:r>
-            <a:r>
-              <a:rPr lang="en-US" dirty="0"/>
-              <a:t> is marked as undefined (</a:t>
-            </a:r>
-            <a:r>
-              <a:rPr lang="en-US" sz="1200" kern="1200" dirty="0">
-                <a:solidFill>
-                  <a:schemeClr val="tx1"/>
-                </a:solidFill>
-                <a:latin typeface="+mn-lt"/>
-                <a:ea typeface="+mn-ea"/>
-                <a:cs typeface="+mn-cs"/>
-              </a:rPr>
-              <a:t>*UND*</a:t>
+              <a:t>-r</a:t>
             </a:r>
             <a:r>
               <a:rPr lang="en-US" dirty="0"/>
@@ -3393,7 +4435,7 @@
           <a:p>
             <a:fld id="{3C11C18F-566C-4A85-8022-99BE34D7F2A5}" type="slidenum">
               <a:rPr lang="en-US" smtClean="0"/>
-              <a:t>15</a:t>
+              <a:t>11</a:t>
             </a:fld>
             <a:endParaRPr lang="en-US"/>
           </a:p>
@@ -3402,7 +4444,7 @@
     </p:spTree>
     <p:extLst>
       <p:ext uri="{BB962C8B-B14F-4D97-AF65-F5344CB8AC3E}">
-        <p14:creationId xmlns:p14="http://schemas.microsoft.com/office/powerpoint/2010/main" val="3957322862"/>
+        <p14:creationId xmlns:p14="http://schemas.microsoft.com/office/powerpoint/2010/main" val="4166332713"/>
       </p:ext>
     </p:extLst>
   </p:cSld>
@@ -3456,83 +4498,43 @@
           <a:bodyPr/>
           <a:lstStyle/>
           <a:p>
-            <a:pPr marL="0" marR="0" lvl="0" indent="0" algn="l" defTabSz="914400" rtl="0" eaLnBrk="1" fontAlgn="auto" latinLnBrk="0" hangingPunct="1">
-              <a:lnSpc>
-                <a:spcPct val="100000"/>
-              </a:lnSpc>
-              <a:spcBef>
-                <a:spcPts val="0"/>
-              </a:spcBef>
-              <a:spcAft>
-                <a:spcPts val="0"/>
-              </a:spcAft>
-              <a:buClrTx/>
-              <a:buSzTx/>
-              <a:buFontTx/>
-              <a:buNone/>
-              <a:tabLst/>
-              <a:defRPr/>
-            </a:pPr>
             <a:r>
               <a:rPr lang="en-US" b="1" dirty="0"/>
-              <a:t>Relocation Records</a:t>
-            </a:r>
-            <a:r>
-              <a:rPr lang="en-US" dirty="0"/>
-              <a:t>: </a:t>
+              <a:t>Figure:</a:t>
             </a:r>
           </a:p>
           <a:p>
-            <a:pPr marL="0" marR="0" lvl="0" indent="0" algn="l" defTabSz="914400" rtl="0" eaLnBrk="1" fontAlgn="auto" latinLnBrk="0" hangingPunct="1">
-              <a:lnSpc>
-                <a:spcPct val="100000"/>
-              </a:lnSpc>
-              <a:spcBef>
-                <a:spcPts val="0"/>
-              </a:spcBef>
-              <a:spcAft>
-                <a:spcPts val="0"/>
-              </a:spcAft>
-              <a:buClrTx/>
-              <a:buSzTx/>
-              <a:buFontTx/>
-              <a:buNone/>
-              <a:tabLst/>
-              <a:defRPr/>
-            </a:pPr>
             <a:r>
               <a:rPr lang="en-US" dirty="0"/>
-              <a:t>Shows where code needs patching (e.g., </a:t>
-            </a:r>
-            <a:r>
-              <a:rPr lang="en-US" sz="1200" kern="1200" dirty="0">
-                <a:solidFill>
-                  <a:schemeClr val="tx1"/>
-                </a:solidFill>
-                <a:latin typeface="+mn-lt"/>
-                <a:ea typeface="+mn-ea"/>
-                <a:cs typeface="+mn-cs"/>
-              </a:rPr>
-              <a:t>R_X86_64_PC32</a:t>
-            </a:r>
-            <a:r>
-              <a:rPr lang="en-US" dirty="0"/>
-              <a:t> for PC-relative calls).</a:t>
+              <a:t>A terminal output listing relocation records for an object file, </a:t>
             </a:r>
           </a:p>
           <a:p>
-            <a:endParaRPr lang="en-US" dirty="0"/>
+            <a:r>
+              <a:rPr lang="en-US" dirty="0"/>
+              <a:t>showing offsets and types like ARM64_RELOC_BRANCH26 </a:t>
+            </a:r>
           </a:p>
           <a:p>
             <a:r>
-              <a:rPr lang="en-US" b="1" u="sng" dirty="0"/>
-              <a:t>See example:</a:t>
-            </a:r>
-          </a:p>
-          <a:p>
-            <a:r>
               <a:rPr lang="en-US" dirty="0"/>
-              <a:t>Static Relocation directory</a:t>
+              <a:t>for symbols such as _</a:t>
+            </a:r>
+            <a:r>
+              <a:rPr lang="en-US" dirty="0" err="1"/>
+              <a:t>print_message</a:t>
+            </a:r>
+            <a:r>
+              <a:rPr lang="en-US" dirty="0"/>
+              <a:t> and _</a:t>
+            </a:r>
+            <a:r>
+              <a:rPr lang="en-US" dirty="0" err="1"/>
+              <a:t>printf</a:t>
+            </a:r>
+            <a:r>
+              <a:rPr lang="en-US" dirty="0"/>
+              <a:t>.</a:t>
             </a:r>
           </a:p>
           <a:p>
@@ -3557,7 +4559,7 @@
           <a:p>
             <a:fld id="{3C11C18F-566C-4A85-8022-99BE34D7F2A5}" type="slidenum">
               <a:rPr lang="en-US" smtClean="0"/>
-              <a:t>16</a:t>
+              <a:t>12</a:t>
             </a:fld>
             <a:endParaRPr lang="en-US"/>
           </a:p>
@@ -3566,7 +4568,7 @@
     </p:spTree>
     <p:extLst>
       <p:ext uri="{BB962C8B-B14F-4D97-AF65-F5344CB8AC3E}">
-        <p14:creationId xmlns:p14="http://schemas.microsoft.com/office/powerpoint/2010/main" val="571153099"/>
+        <p14:creationId xmlns:p14="http://schemas.microsoft.com/office/powerpoint/2010/main" val="3375502043"/>
       </p:ext>
     </p:extLst>
   </p:cSld>
@@ -3727,7 +4729,7 @@
           <a:p>
             <a:fld id="{1D8BD707-D9CF-40AE-B4C6-C98DA3205C09}" type="datetimeFigureOut">
               <a:rPr lang="en-US"/>
-              <a:t>2/17/2026</a:t>
+              <a:t>2/20/2026</a:t>
             </a:fld>
             <a:endParaRPr lang="en-US"/>
           </a:p>
@@ -3904,7 +4906,7 @@
           <a:p>
             <a:fld id="{1D8BD707-D9CF-40AE-B4C6-C98DA3205C09}" type="datetimeFigureOut">
               <a:rPr lang="en-US"/>
-              <a:t>2/17/2026</a:t>
+              <a:t>2/20/2026</a:t>
             </a:fld>
             <a:endParaRPr lang="en-US"/>
           </a:p>
@@ -4118,7 +5120,7 @@
           <a:p>
             <a:fld id="{1D8BD707-D9CF-40AE-B4C6-C98DA3205C09}" type="datetimeFigureOut">
               <a:rPr lang="en-US"/>
-              <a:t>2/17/2026</a:t>
+              <a:t>2/20/2026</a:t>
             </a:fld>
             <a:endParaRPr lang="en-US"/>
           </a:p>
@@ -4266,7 +5268,7 @@
           <a:p>
             <a:fld id="{1D8BD707-D9CF-40AE-B4C6-C98DA3205C09}" type="datetimeFigureOut">
               <a:rPr lang="en-US"/>
-              <a:t>2/17/2026</a:t>
+              <a:t>2/20/2026</a:t>
             </a:fld>
             <a:endParaRPr lang="en-US"/>
           </a:p>
@@ -4385,7 +5387,7 @@
           <a:p>
             <a:fld id="{1D8BD707-D9CF-40AE-B4C6-C98DA3205C09}" type="datetimeFigureOut">
               <a:rPr lang="en-US"/>
-              <a:t>2/17/2026</a:t>
+              <a:t>2/20/2026</a:t>
             </a:fld>
             <a:endParaRPr lang="en-US"/>
           </a:p>
@@ -4632,7 +5634,7 @@
           <a:p>
             <a:fld id="{1D8BD707-D9CF-40AE-B4C6-C98DA3205C09}" type="datetimeFigureOut">
               <a:rPr lang="en-US"/>
-              <a:t>2/17/2026</a:t>
+              <a:t>2/20/2026</a:t>
             </a:fld>
             <a:endParaRPr lang="en-US"/>
           </a:p>
@@ -5367,7 +6369,7 @@
             <p:nvPr/>
           </p:nvPicPr>
           <p:blipFill>
-            <a:blip r:embed="rId2" cstate="print"/>
+            <a:blip r:embed="rId3" cstate="print"/>
             <a:stretch>
               <a:fillRect/>
             </a:stretch>
@@ -5507,7 +6509,7 @@
                 </a:uFill>
                 <a:latin typeface="Arial MT"/>
                 <a:cs typeface="Arial MT"/>
-                <a:hlinkClick r:id="rId3"/>
+                <a:hlinkClick r:id="rId4"/>
               </a:rPr>
               <a:t>https://people.cs.pitt.edu/~xiane</a:t>
             </a:r>
@@ -5533,7 +6535,7 @@
                 </a:uFill>
                 <a:latin typeface="Arial MT"/>
                 <a:cs typeface="Arial MT"/>
-                <a:hlinkClick r:id="rId3"/>
+                <a:hlinkClick r:id="rId4"/>
               </a:rPr>
               <a:t>izhang/notes/Linking.html</a:t>
             </a:r>
@@ -5883,7 +6885,7 @@
               </a:rPr>
               <a:t>example.o</a:t>
             </a:r>
-            <a:endParaRPr sz="2000">
+            <a:endParaRPr sz="2000" dirty="0">
               <a:latin typeface="Arial"/>
               <a:cs typeface="Arial"/>
             </a:endParaRPr>
@@ -6122,7 +7124,7 @@
               </a:rPr>
               <a:t>example.o</a:t>
             </a:r>
-            <a:endParaRPr sz="2000">
+            <a:endParaRPr sz="2000" dirty="0">
               <a:latin typeface="Arial"/>
               <a:cs typeface="Arial"/>
             </a:endParaRPr>
@@ -6308,7 +7310,7 @@
               </a:rPr>
               <a:t>example.o</a:t>
             </a:r>
-            <a:endParaRPr sz="2000">
+            <a:endParaRPr sz="2000" dirty="0">
               <a:latin typeface="Arial"/>
               <a:cs typeface="Arial"/>
             </a:endParaRPr>
@@ -6412,8 +7414,8 @@
         </p:nvSpPr>
         <p:spPr>
           <a:xfrm>
-            <a:off x="4864562" y="4724400"/>
-            <a:ext cx="6895465" cy="1881221"/>
+            <a:off x="4864562" y="4648200"/>
+            <a:ext cx="6895465" cy="2035109"/>
           </a:xfrm>
           <a:prstGeom prst="rect">
             <a:avLst/>
@@ -6432,6 +7434,9 @@
               <a:spcBef>
                 <a:spcPts val="100"/>
               </a:spcBef>
+              <a:spcAft>
+                <a:spcPts val="600"/>
+              </a:spcAft>
               <a:buFont typeface="Arial MT"/>
               <a:buChar char="●"/>
               <a:tabLst>
@@ -6697,6 +7702,9 @@
               <a:lnSpc>
                 <a:spcPct val="114000"/>
               </a:lnSpc>
+              <a:spcAft>
+                <a:spcPts val="600"/>
+              </a:spcAft>
               <a:buFont typeface="Arial MT"/>
               <a:buChar char="●"/>
               <a:tabLst>
@@ -7781,7 +8789,7 @@
               </a:rPr>
               <a:t>example.o</a:t>
             </a:r>
-            <a:endParaRPr sz="2000">
+            <a:endParaRPr sz="2000" dirty="0">
               <a:latin typeface="Arial"/>
               <a:cs typeface="Arial"/>
             </a:endParaRPr>
@@ -7819,7 +8827,7 @@
         <p:spPr>
           <a:xfrm>
             <a:off x="5204425" y="5374008"/>
-            <a:ext cx="6033770" cy="656590"/>
+            <a:ext cx="6033770" cy="622863"/>
           </a:xfrm>
           <a:prstGeom prst="rect">
             <a:avLst/>
@@ -7902,6 +8910,12 @@
               </a:rPr>
               <a:t> </a:t>
             </a:r>
+            <a:br>
+              <a:rPr lang="en-US" sz="1800" spc="-15" dirty="0">
+                <a:latin typeface="Arial MT"/>
+                <a:cs typeface="Arial MT"/>
+              </a:rPr>
+            </a:br>
             <a:r>
               <a:rPr sz="1800" dirty="0">
                 <a:latin typeface="Arial MT"/>
@@ -8020,7 +9034,7 @@
         <p:spPr>
           <a:xfrm>
             <a:off x="440099" y="1775083"/>
-            <a:ext cx="4366260" cy="3450304"/>
+            <a:ext cx="4366260" cy="3373359"/>
           </a:xfrm>
           <a:prstGeom prst="rect">
             <a:avLst/>
@@ -8214,6 +9228,9 @@
               <a:lnSpc>
                 <a:spcPct val="114999"/>
               </a:lnSpc>
+              <a:spcAft>
+                <a:spcPts val="600"/>
+              </a:spcAft>
               <a:buClr>
                 <a:srgbClr val="000000"/>
               </a:buClr>
@@ -8244,11 +9261,18 @@
               <a:t> </a:t>
             </a:r>
             <a:r>
+              <a:rPr lang="en-US" b="1" spc="-25" dirty="0">
+                <a:latin typeface="Courier New"/>
+                <a:cs typeface="Courier New"/>
+              </a:rPr>
+              <a:t>or</a:t>
+            </a:r>
+            <a:r>
               <a:rPr lang="en-US" spc="-25" dirty="0">
                 <a:latin typeface="Courier New"/>
                 <a:cs typeface="Courier New"/>
               </a:rPr>
-              <a:t>or </a:t>
+              <a:t> </a:t>
             </a:r>
             <a:r>
               <a:rPr lang="en-US" b="1" spc="-10" dirty="0">
@@ -8274,27 +9298,19 @@
               </a:rPr>
               <a:t> </a:t>
             </a:r>
+            <a:br>
+              <a:rPr lang="en-US" spc="65" dirty="0">
+                <a:latin typeface="Arial MT"/>
+                <a:cs typeface="Arial MT"/>
+              </a:rPr>
+            </a:br>
             <a:r>
               <a:rPr lang="en-US" spc="-20" dirty="0">
                 <a:latin typeface="Arial MT"/>
                 <a:cs typeface="Arial MT"/>
               </a:rPr>
-              <a:t>This</a:t>
-            </a:r>
-            <a:endParaRPr lang="en-US" dirty="0">
-              <a:latin typeface="Arial MT"/>
-              <a:cs typeface="Arial MT"/>
-            </a:endParaRPr>
-          </a:p>
-          <a:p>
-            <a:pPr marL="836294" marR="267335">
-              <a:lnSpc>
-                <a:spcPct val="114999"/>
-              </a:lnSpc>
-              <a:spcAft>
-                <a:spcPts val="1200"/>
-              </a:spcAft>
-            </a:pPr>
+              <a:t>This </a:t>
+            </a:r>
             <a:r>
               <a:rPr lang="en-US" dirty="0">
                 <a:latin typeface="Arial MT"/>
@@ -8582,7 +9598,7 @@
           <p:nvPr/>
         </p:nvPicPr>
         <p:blipFill>
-          <a:blip r:embed="rId2" cstate="print"/>
+          <a:blip r:embed="rId3" cstate="print"/>
           <a:stretch>
             <a:fillRect/>
           </a:stretch>
@@ -8606,7 +9622,7 @@
         <p:spPr>
           <a:xfrm>
             <a:off x="5204425" y="5374008"/>
-            <a:ext cx="6033770" cy="656590"/>
+            <a:ext cx="6033770" cy="622863"/>
           </a:xfrm>
           <a:prstGeom prst="rect">
             <a:avLst/>
@@ -8689,6 +9705,12 @@
               </a:rPr>
               <a:t> </a:t>
             </a:r>
+            <a:br>
+              <a:rPr lang="en-US" spc="-15" dirty="0">
+                <a:latin typeface="Arial MT"/>
+                <a:cs typeface="Arial MT"/>
+              </a:rPr>
+            </a:br>
             <a:r>
               <a:rPr sz="1800" dirty="0">
                 <a:latin typeface="Arial MT"/>
@@ -8766,7 +9788,7 @@
               </a:rPr>
               <a:t>.</a:t>
             </a:r>
-            <a:endParaRPr sz="1800">
+            <a:endParaRPr sz="1800" dirty="0">
               <a:latin typeface="Arial MT"/>
               <a:cs typeface="Arial MT"/>
             </a:endParaRPr>
@@ -8861,12 +9883,32 @@
               </a:rPr>
               <a:t>RELOCATION RECORDS FOR [.text]: </a:t>
             </a:r>
-            <a:r>
-              <a:rPr lang="en-US" dirty="0">
+            <a:br>
+              <a:rPr lang="en-US" b="1" dirty="0">
                 <a:latin typeface="Courier New" panose="02070309020205020404" pitchFamily="49" charset="0"/>
                 <a:cs typeface="Courier New" panose="02070309020205020404" pitchFamily="49" charset="0"/>
               </a:rPr>
-              <a:t>Shows entries for the code section.</a:t>
+            </a:br>
+            <a:r>
+              <a:rPr lang="en-US" dirty="0">
+                <a:latin typeface="Arial MT"/>
+                <a:cs typeface="Courier New" panose="02070309020205020404" pitchFamily="49" charset="0"/>
+              </a:rPr>
+              <a:t>Shows entries for the </a:t>
+            </a:r>
+            <a:r>
+              <a:rPr lang="en-US" b="1" dirty="0">
+                <a:latin typeface="Arial MT"/>
+                <a:cs typeface="Courier New" panose="02070309020205020404" pitchFamily="49" charset="0"/>
+              </a:rPr>
+              <a:t>code section</a:t>
+            </a:r>
+            <a:r>
+              <a:rPr lang="en-US" dirty="0">
+                <a:latin typeface="Arial MT"/>
+                <a:cs typeface="Courier New" panose="02070309020205020404" pitchFamily="49" charset="0"/>
+              </a:rPr>
+              <a:t>.</a:t>
             </a:r>
           </a:p>
         </p:txBody>
@@ -8984,14 +10026,14 @@
               </a:tabLst>
             </a:pPr>
             <a:r>
-              <a:rPr lang="en-US" sz="1800" spc="-10" dirty="0" err="1">
+              <a:rPr lang="en-US" sz="1800" b="1" spc="-10" dirty="0" err="1">
                 <a:latin typeface="Courier New"/>
                 <a:cs typeface="Courier New"/>
               </a:rPr>
               <a:t>print_message</a:t>
             </a:r>
             <a:r>
-              <a:rPr lang="en-US" sz="1800" spc="-590" dirty="0">
+              <a:rPr lang="en-US" sz="1800" b="1" spc="-590" dirty="0">
                 <a:latin typeface="Courier New"/>
                 <a:cs typeface="Courier New"/>
               </a:rPr>
@@ -9146,7 +10188,7 @@
               </a:tabLst>
             </a:pPr>
             <a:r>
-              <a:rPr lang="en-US" sz="1800" spc="-10" dirty="0" err="1">
+              <a:rPr lang="en-US" sz="1800" b="1" spc="-10" dirty="0" err="1">
                 <a:latin typeface="Courier New"/>
                 <a:cs typeface="Courier New"/>
               </a:rPr>
@@ -9223,7 +10265,7 @@
               <a:t>(from </a:t>
             </a:r>
             <a:r>
-              <a:rPr lang="en-US" sz="1800" dirty="0" err="1">
+              <a:rPr lang="en-US" sz="1800" b="1" dirty="0" err="1">
                 <a:latin typeface="Courier New"/>
                 <a:cs typeface="Courier New"/>
               </a:rPr>
@@ -9804,7 +10846,7 @@
               </a:rPr>
               <a:t>example</a:t>
             </a:r>
-            <a:endParaRPr sz="2000">
+            <a:endParaRPr sz="2000" dirty="0">
               <a:latin typeface="Arial"/>
               <a:cs typeface="Arial"/>
             </a:endParaRPr>
@@ -10037,7 +11079,7 @@
               </a:rPr>
               <a:t>example</a:t>
             </a:r>
-            <a:endParaRPr sz="2000">
+            <a:endParaRPr sz="2000" dirty="0">
               <a:latin typeface="Arial"/>
               <a:cs typeface="Arial"/>
             </a:endParaRPr>
@@ -10602,7 +11644,7 @@
               </a:rPr>
               <a:t>relocation_example1.c</a:t>
             </a:r>
-            <a:endParaRPr sz="2000">
+            <a:endParaRPr sz="2000" dirty="0">
               <a:latin typeface="Arial"/>
               <a:cs typeface="Arial"/>
             </a:endParaRPr>
@@ -10869,7 +11911,7 @@
               </a:rPr>
               <a:t>relocation_example1.c</a:t>
             </a:r>
-            <a:endParaRPr sz="2000">
+            <a:endParaRPr sz="2000" dirty="0">
               <a:latin typeface="Arial"/>
               <a:cs typeface="Arial"/>
             </a:endParaRPr>
@@ -11984,7 +13026,7 @@
               </a:rPr>
               <a:t> relocation_example1.o</a:t>
             </a:r>
-            <a:endParaRPr sz="2000">
+            <a:endParaRPr sz="2000" dirty="0">
               <a:latin typeface="Arial"/>
               <a:cs typeface="Arial"/>
             </a:endParaRPr>
@@ -12045,7 +13087,7 @@
               </a:rPr>
               <a:t> a.out</a:t>
             </a:r>
-            <a:endParaRPr sz="2000">
+            <a:endParaRPr sz="2000" dirty="0">
               <a:latin typeface="Arial"/>
               <a:cs typeface="Arial"/>
             </a:endParaRPr>
@@ -17670,46 +18712,53 @@
               <a:t> </a:t>
             </a:r>
             <a:r>
-              <a:rPr sz="1800" dirty="0">
+              <a:rPr sz="1800" b="1" dirty="0">
                 <a:latin typeface="Arial MT"/>
                 <a:cs typeface="Arial MT"/>
               </a:rPr>
               <a:t>global</a:t>
             </a:r>
             <a:r>
-              <a:rPr sz="1800" spc="-20" dirty="0">
-                <a:latin typeface="Arial MT"/>
-                <a:cs typeface="Arial MT"/>
-              </a:rPr>
-              <a:t> </a:t>
-            </a:r>
-            <a:r>
-              <a:rPr sz="1800" dirty="0">
+              <a:rPr sz="1800" b="1" spc="-20" dirty="0">
+                <a:latin typeface="Arial MT"/>
+                <a:cs typeface="Arial MT"/>
+              </a:rPr>
+              <a:t> </a:t>
+            </a:r>
+            <a:r>
+              <a:rPr sz="1800" b="1" dirty="0">
                 <a:latin typeface="Arial MT"/>
                 <a:cs typeface="Arial MT"/>
               </a:rPr>
               <a:t>or</a:t>
             </a:r>
             <a:r>
-              <a:rPr sz="1800" spc="-20" dirty="0">
-                <a:latin typeface="Arial MT"/>
-                <a:cs typeface="Arial MT"/>
-              </a:rPr>
-              <a:t> </a:t>
-            </a:r>
-            <a:r>
-              <a:rPr sz="1800" spc="-10" dirty="0">
+              <a:rPr sz="1800" b="1" spc="-20" dirty="0">
+                <a:latin typeface="Arial MT"/>
+                <a:cs typeface="Arial MT"/>
+              </a:rPr>
+              <a:t> </a:t>
+            </a:r>
+            <a:r>
+              <a:rPr sz="1800" b="1" spc="-10" dirty="0">
                 <a:latin typeface="Arial MT"/>
                 <a:cs typeface="Arial MT"/>
               </a:rPr>
               <a:t>static </a:t>
             </a:r>
             <a:r>
-              <a:rPr sz="1800" dirty="0">
-                <a:latin typeface="Arial MT"/>
-                <a:cs typeface="Arial MT"/>
-              </a:rPr>
-              <a:t>variables.</a:t>
+              <a:rPr sz="1800" b="1" dirty="0">
+                <a:latin typeface="Arial MT"/>
+                <a:cs typeface="Arial MT"/>
+              </a:rPr>
+              <a:t>variables</a:t>
+            </a:r>
+            <a:r>
+              <a:rPr sz="1800" dirty="0">
+                <a:latin typeface="Arial MT"/>
+                <a:cs typeface="Arial MT"/>
+              </a:rPr>
+              <a:t>.</a:t>
             </a:r>
             <a:r>
               <a:rPr sz="1800" spc="-70" dirty="0">
@@ -18343,7 +19392,7 @@
               <a:t> </a:t>
             </a:r>
             <a:r>
-              <a:rPr sz="1800" dirty="0">
+              <a:rPr sz="1800" b="1" dirty="0">
                 <a:latin typeface="Arial MT"/>
                 <a:cs typeface="Arial MT"/>
               </a:rPr>
@@ -18730,7 +19779,7 @@
         <p:spPr>
           <a:xfrm>
             <a:off x="6651225" y="2475606"/>
-            <a:ext cx="4991735" cy="2800382"/>
+            <a:ext cx="5159775" cy="2800382"/>
           </a:xfrm>
           <a:prstGeom prst="rect">
             <a:avLst/>
@@ -18891,21 +19940,21 @@
               <a:t> </a:t>
             </a:r>
             <a:r>
-              <a:rPr sz="1800" i="1" dirty="0">
+              <a:rPr sz="1800" b="1" i="1" dirty="0">
                 <a:latin typeface="Arial"/>
                 <a:cs typeface="Arial"/>
               </a:rPr>
               <a:t>text</a:t>
             </a:r>
             <a:r>
-              <a:rPr sz="1800" i="1" spc="-15" dirty="0">
-                <a:latin typeface="Arial"/>
-                <a:cs typeface="Arial"/>
-              </a:rPr>
-              <a:t> </a:t>
-            </a:r>
-            <a:r>
-              <a:rPr sz="1800" i="1" dirty="0">
+              <a:rPr sz="1800" b="1" i="1" spc="-15" dirty="0">
+                <a:latin typeface="Arial"/>
+                <a:cs typeface="Arial"/>
+              </a:rPr>
+              <a:t> </a:t>
+            </a:r>
+            <a:r>
+              <a:rPr sz="1800" b="1" i="1" dirty="0">
                 <a:latin typeface="Arial"/>
                 <a:cs typeface="Arial"/>
               </a:rPr>
@@ -19087,7 +20136,7 @@
               <a:t>with </a:t>
             </a:r>
             <a:r>
-              <a:rPr sz="1800" dirty="0">
+              <a:rPr sz="1800" b="1" dirty="0">
                 <a:solidFill>
                   <a:srgbClr val="188037"/>
                 </a:solidFill>
@@ -19412,7 +20461,7 @@
               <a:t> </a:t>
             </a:r>
             <a:r>
-              <a:rPr sz="1800" dirty="0">
+              <a:rPr sz="1800" b="1" dirty="0">
                 <a:latin typeface="Arial MT"/>
                 <a:cs typeface="Arial MT"/>
               </a:rPr>
@@ -19863,25 +20912,32 @@
               <a:t> </a:t>
             </a:r>
             <a:r>
-              <a:rPr sz="1800" dirty="0">
+              <a:rPr sz="1800" b="1" dirty="0">
                 <a:latin typeface="Arial MT"/>
                 <a:cs typeface="Arial MT"/>
               </a:rPr>
               <a:t>undefined</a:t>
             </a:r>
             <a:r>
-              <a:rPr sz="1800" spc="-25" dirty="0">
-                <a:latin typeface="Arial MT"/>
-                <a:cs typeface="Arial MT"/>
-              </a:rPr>
-              <a:t> </a:t>
-            </a:r>
-            <a:r>
-              <a:rPr sz="1800" dirty="0">
-                <a:latin typeface="Arial MT"/>
-                <a:cs typeface="Arial MT"/>
-              </a:rPr>
-              <a:t>symbols,</a:t>
+              <a:rPr sz="1800" b="1" spc="-25" dirty="0">
+                <a:latin typeface="Arial MT"/>
+                <a:cs typeface="Arial MT"/>
+              </a:rPr>
+              <a:t> </a:t>
+            </a:r>
+            <a:r>
+              <a:rPr sz="1800" b="1" dirty="0">
+                <a:latin typeface="Arial MT"/>
+                <a:cs typeface="Arial MT"/>
+              </a:rPr>
+              <a:t>symbols</a:t>
+            </a:r>
+            <a:r>
+              <a:rPr sz="1800" dirty="0">
+                <a:latin typeface="Arial MT"/>
+                <a:cs typeface="Arial MT"/>
+              </a:rPr>
+              <a:t>,</a:t>
             </a:r>
             <a:r>
               <a:rPr sz="1800" spc="-20" dirty="0">
@@ -20231,39 +21287,46 @@
               <a:t> </a:t>
             </a:r>
             <a:r>
-              <a:rPr sz="1800" dirty="0">
+              <a:rPr sz="1800" b="1" dirty="0">
                 <a:latin typeface="Arial MT"/>
                 <a:cs typeface="Arial MT"/>
               </a:rPr>
               <a:t>uninitialized</a:t>
             </a:r>
             <a:r>
-              <a:rPr sz="1800" spc="-20" dirty="0">
-                <a:latin typeface="Arial MT"/>
-                <a:cs typeface="Arial MT"/>
-              </a:rPr>
-              <a:t> </a:t>
-            </a:r>
-            <a:r>
-              <a:rPr sz="1800" dirty="0">
+              <a:rPr sz="1800" b="1" spc="-20" dirty="0">
+                <a:latin typeface="Arial MT"/>
+                <a:cs typeface="Arial MT"/>
+              </a:rPr>
+              <a:t> </a:t>
+            </a:r>
+            <a:r>
+              <a:rPr sz="1800" b="1" dirty="0">
                 <a:latin typeface="Arial MT"/>
                 <a:cs typeface="Arial MT"/>
               </a:rPr>
               <a:t>static</a:t>
             </a:r>
             <a:r>
-              <a:rPr sz="1800" spc="-20" dirty="0">
-                <a:latin typeface="Arial MT"/>
-                <a:cs typeface="Arial MT"/>
-              </a:rPr>
-              <a:t> </a:t>
+              <a:rPr sz="1800" b="1" spc="-20" dirty="0">
+                <a:latin typeface="Arial MT"/>
+                <a:cs typeface="Arial MT"/>
+              </a:rPr>
+              <a:t> </a:t>
+            </a:r>
+            <a:r>
+              <a:rPr sz="1800" b="1" spc="-10" dirty="0">
+                <a:latin typeface="Arial MT"/>
+                <a:cs typeface="Arial MT"/>
+              </a:rPr>
+              <a:t>variables</a:t>
             </a:r>
             <a:r>
               <a:rPr sz="1800" spc="-10" dirty="0">
                 <a:latin typeface="Arial MT"/>
                 <a:cs typeface="Arial MT"/>
               </a:rPr>
-              <a:t>variables.</a:t>
+              <a:t>.</a:t>
             </a:r>
             <a:endParaRPr sz="1800" dirty="0">
               <a:latin typeface="Arial MT"/>
@@ -20552,7 +21615,7 @@
         <p:spPr>
           <a:xfrm>
             <a:off x="6741750" y="2514600"/>
-            <a:ext cx="5027295" cy="4113049"/>
+            <a:ext cx="5145450" cy="4113049"/>
           </a:xfrm>
           <a:prstGeom prst="rect">
             <a:avLst/>
@@ -20668,28 +21731,28 @@
               <a:t>a </a:t>
             </a:r>
             <a:r>
-              <a:rPr sz="1800" i="1" dirty="0">
+              <a:rPr sz="1800" b="1" i="1" dirty="0">
                 <a:latin typeface="Arial"/>
                 <a:cs typeface="Arial"/>
               </a:rPr>
               <a:t>string</a:t>
             </a:r>
             <a:r>
-              <a:rPr sz="1800" i="1" spc="-15" dirty="0">
-                <a:latin typeface="Arial"/>
-                <a:cs typeface="Arial"/>
-              </a:rPr>
-              <a:t> </a:t>
-            </a:r>
-            <a:r>
-              <a:rPr sz="1800" i="1" dirty="0">
+              <a:rPr sz="1800" b="1" i="1" spc="-15" dirty="0">
+                <a:latin typeface="Arial"/>
+                <a:cs typeface="Arial"/>
+              </a:rPr>
+              <a:t> </a:t>
+            </a:r>
+            <a:r>
+              <a:rPr sz="1800" b="1" i="1" dirty="0">
                 <a:latin typeface="Arial"/>
                 <a:cs typeface="Arial"/>
               </a:rPr>
               <a:t>literal</a:t>
             </a:r>
             <a:r>
-              <a:rPr sz="1800" i="1" spc="-5" dirty="0">
+              <a:rPr sz="1800" b="1" i="1" spc="-5" dirty="0">
                 <a:latin typeface="Arial"/>
                 <a:cs typeface="Arial"/>
               </a:rPr>
@@ -21005,25 +22068,32 @@
               <a:t> </a:t>
             </a:r>
             <a:r>
-              <a:rPr sz="1800" dirty="0">
+              <a:rPr sz="1800" b="1" dirty="0">
                 <a:latin typeface="Arial MT"/>
                 <a:cs typeface="Arial MT"/>
               </a:rPr>
               <a:t>local</a:t>
             </a:r>
             <a:r>
-              <a:rPr sz="1800" spc="-5" dirty="0">
-                <a:latin typeface="Arial MT"/>
-                <a:cs typeface="Arial MT"/>
-              </a:rPr>
-              <a:t> </a:t>
+              <a:rPr sz="1800" b="1" spc="-5" dirty="0">
+                <a:latin typeface="Arial MT"/>
+                <a:cs typeface="Arial MT"/>
+              </a:rPr>
+              <a:t> </a:t>
+            </a:r>
+            <a:r>
+              <a:rPr sz="1800" b="1" spc="-10" dirty="0">
+                <a:latin typeface="Arial MT"/>
+                <a:cs typeface="Arial MT"/>
+              </a:rPr>
+              <a:t>label</a:t>
             </a:r>
             <a:r>
               <a:rPr sz="1800" spc="-10" dirty="0">
                 <a:latin typeface="Arial MT"/>
                 <a:cs typeface="Arial MT"/>
               </a:rPr>
-              <a:t>label, </a:t>
+              <a:t>, </a:t>
             </a:r>
             <a:r>
               <a:rPr sz="1800" dirty="0">
@@ -23926,7 +24996,7 @@
               </a:rPr>
               <a:t>print_global.c</a:t>
             </a:r>
-            <a:endParaRPr sz="2000">
+            <a:endParaRPr sz="2000" dirty="0">
               <a:latin typeface="Arial"/>
               <a:cs typeface="Arial"/>
             </a:endParaRPr>
@@ -24032,7 +25102,7 @@
         <p:spPr>
           <a:xfrm>
             <a:off x="6356549" y="4103749"/>
-            <a:ext cx="5544820" cy="492759"/>
+            <a:ext cx="5544820" cy="384080"/>
           </a:xfrm>
           <a:prstGeom prst="rect">
             <a:avLst/>
@@ -24145,7 +25215,17 @@
                 <a:latin typeface="Arial"/>
                 <a:cs typeface="Arial"/>
               </a:rPr>
-              <a:t>libprint.dylib</a:t>
+              <a:t>libprint.</a:t>
+            </a:r>
+            <a:r>
+              <a:rPr lang="en-US" sz="2000" b="1" dirty="0">
+                <a:solidFill>
+                  <a:srgbClr val="A00C30"/>
+                </a:solidFill>
+                <a:latin typeface="Arial"/>
+                <a:cs typeface="Arial"/>
+              </a:rPr>
+              <a:t>so</a:t>
             </a:r>
             <a:r>
               <a:rPr sz="2000" b="1" spc="-35" dirty="0">
@@ -24167,7 +25247,7 @@
               </a:rPr>
               <a:t>print_global.o</a:t>
             </a:r>
-            <a:endParaRPr sz="2000">
+            <a:endParaRPr sz="2000" dirty="0">
               <a:latin typeface="Arial"/>
               <a:cs typeface="Arial"/>
             </a:endParaRPr>
@@ -24333,7 +25413,7 @@
         <p:spPr>
           <a:xfrm>
             <a:off x="6356549" y="5315124"/>
-            <a:ext cx="2688590" cy="492759"/>
+            <a:ext cx="2688590" cy="384080"/>
           </a:xfrm>
           <a:prstGeom prst="rect">
             <a:avLst/>
@@ -24416,9 +25496,19 @@
                 <a:latin typeface="Arial"/>
                 <a:cs typeface="Arial"/>
               </a:rPr>
-              <a:t>libprint.dylib</a:t>
-            </a:r>
-            <a:endParaRPr sz="2000">
+              <a:t>libprint.</a:t>
+            </a:r>
+            <a:r>
+              <a:rPr lang="en-US" sz="2000" b="1" spc="-10" dirty="0">
+                <a:solidFill>
+                  <a:srgbClr val="A00C30"/>
+                </a:solidFill>
+                <a:latin typeface="Arial"/>
+                <a:cs typeface="Arial"/>
+              </a:rPr>
+              <a:t>so</a:t>
+            </a:r>
+            <a:endParaRPr sz="2000" dirty="0">
               <a:latin typeface="Arial"/>
               <a:cs typeface="Arial"/>
             </a:endParaRPr>
@@ -24701,6 +25791,26 @@
               </a:spcBef>
             </a:pPr>
             <a:r>
+              <a:rPr sz="2000" b="1" dirty="0" err="1">
+                <a:solidFill>
+                  <a:srgbClr val="A00C30"/>
+                </a:solidFill>
+                <a:latin typeface="Arial"/>
+                <a:cs typeface="Arial"/>
+              </a:rPr>
+              <a:t>gcc</a:t>
+            </a:r>
+            <a:r>
+              <a:rPr sz="2000" b="1" spc="-40" dirty="0">
+                <a:solidFill>
+                  <a:srgbClr val="A00C30"/>
+                </a:solidFill>
+                <a:latin typeface="Arial"/>
+                <a:cs typeface="Arial"/>
+              </a:rPr>
+              <a:t> </a:t>
+            </a:r>
+            <a:r>
               <a:rPr sz="2000" b="1" dirty="0">
                 <a:solidFill>
                   <a:srgbClr val="A00C30"/>
@@ -24708,7 +25818,7 @@
                 <a:latin typeface="Arial"/>
                 <a:cs typeface="Arial"/>
               </a:rPr>
-              <a:t>gcc</a:t>
+              <a:t>relocation_example2.c</a:t>
             </a:r>
             <a:r>
               <a:rPr sz="2000" b="1" spc="-40" dirty="0">
@@ -24721,6 +25831,16 @@
               <a:t> </a:t>
             </a:r>
             <a:r>
+              <a:rPr sz="2000" b="1" spc="-10" dirty="0">
+                <a:solidFill>
+                  <a:srgbClr val="A00C30"/>
+                </a:solidFill>
+                <a:latin typeface="Arial"/>
+                <a:cs typeface="Arial"/>
+              </a:rPr>
+              <a:t>-</a:t>
+            </a:r>
+            <a:r>
               <a:rPr sz="2000" b="1" dirty="0">
                 <a:solidFill>
                   <a:srgbClr val="A00C30"/>
@@ -24728,7 +25848,7 @@
                 <a:latin typeface="Arial"/>
                 <a:cs typeface="Arial"/>
               </a:rPr>
-              <a:t>relocation_example2.c</a:t>
+              <a:t>L.</a:t>
             </a:r>
             <a:r>
               <a:rPr sz="2000" b="1" spc="-40" dirty="0">
@@ -24741,6 +25861,36 @@
               <a:t> </a:t>
             </a:r>
             <a:r>
+              <a:rPr sz="2000" b="1" dirty="0">
+                <a:solidFill>
+                  <a:srgbClr val="A00C30"/>
+                </a:solidFill>
+                <a:latin typeface="Arial"/>
+                <a:cs typeface="Arial"/>
+              </a:rPr>
+              <a:t>-</a:t>
+            </a:r>
+            <a:r>
+              <a:rPr sz="2000" b="1" dirty="0" err="1">
+                <a:solidFill>
+                  <a:srgbClr val="A00C30"/>
+                </a:solidFill>
+                <a:latin typeface="Arial"/>
+                <a:cs typeface="Arial"/>
+              </a:rPr>
+              <a:t>lprint</a:t>
+            </a:r>
+            <a:r>
+              <a:rPr sz="2000" b="1" spc="-40" dirty="0">
+                <a:solidFill>
+                  <a:srgbClr val="A00C30"/>
+                </a:solidFill>
+                <a:latin typeface="Arial"/>
+                <a:cs typeface="Arial"/>
+              </a:rPr>
+              <a:t> </a:t>
+            </a:r>
+            <a:r>
               <a:rPr sz="2000" b="1" spc="-10" dirty="0">
                 <a:solidFill>
                   <a:srgbClr val="A00C30"/>
@@ -24751,76 +25901,26 @@
               <a:t>-</a:t>
             </a:r>
             <a:r>
-              <a:rPr sz="2000" b="1" dirty="0">
+              <a:rPr sz="2000" b="1" spc="-50" dirty="0">
                 <a:solidFill>
                   <a:srgbClr val="A00C30"/>
                 </a:solidFill>
                 <a:latin typeface="Arial"/>
                 <a:cs typeface="Arial"/>
               </a:rPr>
-              <a:t>L.</a:t>
-            </a:r>
-            <a:r>
-              <a:rPr sz="2000" b="1" spc="-40" dirty="0">
+              <a:t>o </a:t>
+            </a:r>
+            <a:r>
+              <a:rPr sz="2000" b="1" spc="-10" dirty="0">
                 <a:solidFill>
                   <a:srgbClr val="A00C30"/>
                 </a:solidFill>
                 <a:latin typeface="Arial"/>
                 <a:cs typeface="Arial"/>
               </a:rPr>
-              <a:t> </a:t>
-            </a:r>
-            <a:r>
-              <a:rPr sz="2000" b="1" dirty="0">
-                <a:solidFill>
-                  <a:srgbClr val="A00C30"/>
-                </a:solidFill>
-                <a:latin typeface="Arial"/>
-                <a:cs typeface="Arial"/>
-              </a:rPr>
-              <a:t>-lprint</a:t>
-            </a:r>
-            <a:r>
-              <a:rPr sz="2000" b="1" spc="-40" dirty="0">
-                <a:solidFill>
-                  <a:srgbClr val="A00C30"/>
-                </a:solidFill>
-                <a:latin typeface="Arial"/>
-                <a:cs typeface="Arial"/>
-              </a:rPr>
-              <a:t> </a:t>
-            </a:r>
-            <a:r>
-              <a:rPr sz="2000" b="1" spc="-10" dirty="0">
-                <a:solidFill>
-                  <a:srgbClr val="A00C30"/>
-                </a:solidFill>
-                <a:latin typeface="Arial"/>
-                <a:cs typeface="Arial"/>
-              </a:rPr>
-              <a:t>-</a:t>
-            </a:r>
-            <a:r>
-              <a:rPr sz="2000" b="1" spc="-50" dirty="0">
-                <a:solidFill>
-                  <a:srgbClr val="A00C30"/>
-                </a:solidFill>
-                <a:latin typeface="Arial"/>
-                <a:cs typeface="Arial"/>
-              </a:rPr>
-              <a:t>o </a:t>
-            </a:r>
-            <a:r>
-              <a:rPr sz="2000" b="1" spc="-10" dirty="0">
-                <a:solidFill>
-                  <a:srgbClr val="A00C30"/>
-                </a:solidFill>
-                <a:latin typeface="Arial"/>
-                <a:cs typeface="Arial"/>
-              </a:rPr>
               <a:t>relocation_example2</a:t>
             </a:r>
-            <a:endParaRPr sz="2000">
+            <a:endParaRPr sz="2000" dirty="0">
               <a:latin typeface="Arial"/>
               <a:cs typeface="Arial"/>
             </a:endParaRPr>
@@ -24909,7 +26009,7 @@
           <p:nvPr/>
         </p:nvPicPr>
         <p:blipFill>
-          <a:blip r:embed="rId2" cstate="print"/>
+          <a:blip r:embed="rId3" cstate="print"/>
           <a:stretch>
             <a:fillRect/>
           </a:stretch>
@@ -25304,7 +26404,7 @@
               </a:rPr>
               <a:t>&amp;</a:t>
             </a:r>
-            <a:endParaRPr sz="2000">
+            <a:endParaRPr sz="2000" dirty="0">
               <a:latin typeface="Arial"/>
               <a:cs typeface="Arial"/>
             </a:endParaRPr>
@@ -26228,7 +27328,7 @@
               </a:rPr>
               <a:t>string_operations.c</a:t>
             </a:r>
-            <a:endParaRPr sz="2000">
+            <a:endParaRPr sz="2000" dirty="0">
               <a:latin typeface="Arial"/>
               <a:cs typeface="Arial"/>
             </a:endParaRPr>
@@ -38102,7 +39202,7 @@
               </a:rPr>
               <a:t>string_operations.o</a:t>
             </a:r>
-            <a:endParaRPr sz="2000">
+            <a:endParaRPr sz="2000" dirty="0">
               <a:latin typeface="Arial"/>
               <a:cs typeface="Arial"/>
             </a:endParaRPr>
@@ -44228,8 +45328,8 @@
         </p:nvGrpSpPr>
         <p:grpSpPr>
           <a:xfrm>
-            <a:off x="332587" y="4645987"/>
-            <a:ext cx="5291455" cy="2061845"/>
+            <a:off x="332587" y="4343401"/>
+            <a:ext cx="5291455" cy="2364432"/>
             <a:chOff x="332587" y="4645987"/>
             <a:chExt cx="5291455" cy="2061845"/>
           </a:xfrm>
@@ -44363,8 +45463,8 @@
         </p:nvSpPr>
         <p:spPr>
           <a:xfrm>
-            <a:off x="725650" y="4953000"/>
-            <a:ext cx="4591050" cy="1493870"/>
+            <a:off x="684063" y="4648200"/>
+            <a:ext cx="4802337" cy="1760675"/>
           </a:xfrm>
           <a:prstGeom prst="rect">
             <a:avLst/>
@@ -44383,149 +45483,152 @@
               <a:spcBef>
                 <a:spcPts val="100"/>
               </a:spcBef>
+              <a:spcAft>
+                <a:spcPts val="600"/>
+              </a:spcAft>
             </a:pPr>
             <a:r>
-              <a:rPr sz="1700" dirty="0">
+              <a:rPr dirty="0">
                 <a:latin typeface="Arial MT"/>
                 <a:cs typeface="Arial MT"/>
               </a:rPr>
               <a:t>A</a:t>
             </a:r>
             <a:r>
-              <a:rPr sz="1700" spc="-120" dirty="0">
-                <a:latin typeface="Arial MT"/>
-                <a:cs typeface="Arial MT"/>
-              </a:rPr>
-              <a:t> </a:t>
-            </a:r>
-            <a:r>
-              <a:rPr sz="1700" b="1" dirty="0">
+              <a:rPr spc="-120" dirty="0">
+                <a:latin typeface="Arial MT"/>
+                <a:cs typeface="Arial MT"/>
+              </a:rPr>
+              <a:t> </a:t>
+            </a:r>
+            <a:r>
+              <a:rPr b="1" dirty="0">
                 <a:latin typeface="Arial"/>
                 <a:cs typeface="Arial"/>
               </a:rPr>
               <a:t>static</a:t>
             </a:r>
             <a:r>
-              <a:rPr sz="1700" b="1" spc="-40" dirty="0">
-                <a:latin typeface="Arial"/>
-                <a:cs typeface="Arial"/>
-              </a:rPr>
-              <a:t> </a:t>
-            </a:r>
-            <a:r>
-              <a:rPr sz="1700" b="1" dirty="0">
+              <a:rPr b="1" spc="-40" dirty="0">
+                <a:latin typeface="Arial"/>
+                <a:cs typeface="Arial"/>
+              </a:rPr>
+              <a:t> </a:t>
+            </a:r>
+            <a:r>
+              <a:rPr b="1" dirty="0">
                 <a:latin typeface="Arial"/>
                 <a:cs typeface="Arial"/>
               </a:rPr>
               <a:t>library</a:t>
             </a:r>
             <a:r>
-              <a:rPr sz="1700" b="1" spc="-35" dirty="0">
-                <a:latin typeface="Arial"/>
-                <a:cs typeface="Arial"/>
-              </a:rPr>
-              <a:t> </a:t>
-            </a:r>
-            <a:r>
-              <a:rPr sz="1700" dirty="0">
+              <a:rPr b="1" spc="-35" dirty="0">
+                <a:latin typeface="Arial"/>
+                <a:cs typeface="Arial"/>
+              </a:rPr>
+              <a:t> </a:t>
+            </a:r>
+            <a:r>
+              <a:rPr dirty="0">
                 <a:latin typeface="Arial MT"/>
                 <a:cs typeface="Arial MT"/>
               </a:rPr>
               <a:t>is</a:t>
             </a:r>
             <a:r>
-              <a:rPr sz="1700" spc="-35" dirty="0">
-                <a:latin typeface="Arial MT"/>
-                <a:cs typeface="Arial MT"/>
-              </a:rPr>
-              <a:t> </a:t>
-            </a:r>
-            <a:r>
-              <a:rPr sz="1700" dirty="0">
+              <a:rPr spc="-35" dirty="0">
+                <a:latin typeface="Arial MT"/>
+                <a:cs typeface="Arial MT"/>
+              </a:rPr>
+              <a:t> </a:t>
+            </a:r>
+            <a:r>
+              <a:rPr dirty="0">
                 <a:latin typeface="Arial MT"/>
                 <a:cs typeface="Arial MT"/>
               </a:rPr>
               <a:t>a</a:t>
             </a:r>
             <a:r>
-              <a:rPr sz="1700" spc="-35" dirty="0">
-                <a:latin typeface="Arial MT"/>
-                <a:cs typeface="Arial MT"/>
-              </a:rPr>
-              <a:t> </a:t>
-            </a:r>
-            <a:r>
-              <a:rPr sz="1700" spc="-10" dirty="0">
+              <a:rPr spc="-35" dirty="0">
+                <a:latin typeface="Arial MT"/>
+                <a:cs typeface="Arial MT"/>
+              </a:rPr>
+              <a:t> </a:t>
+            </a:r>
+            <a:r>
+              <a:rPr spc="-10" dirty="0">
                 <a:latin typeface="Arial MT"/>
                 <a:cs typeface="Arial MT"/>
               </a:rPr>
               <a:t>collection</a:t>
             </a:r>
             <a:r>
-              <a:rPr sz="1700" spc="-35" dirty="0">
-                <a:latin typeface="Arial MT"/>
-                <a:cs typeface="Arial MT"/>
-              </a:rPr>
-              <a:t> </a:t>
-            </a:r>
-            <a:r>
-              <a:rPr sz="1700" dirty="0">
+              <a:rPr spc="-35" dirty="0">
+                <a:latin typeface="Arial MT"/>
+                <a:cs typeface="Arial MT"/>
+              </a:rPr>
+              <a:t> </a:t>
+            </a:r>
+            <a:r>
+              <a:rPr dirty="0">
                 <a:latin typeface="Arial MT"/>
                 <a:cs typeface="Arial MT"/>
               </a:rPr>
               <a:t>of</a:t>
             </a:r>
             <a:r>
-              <a:rPr sz="1700" spc="-35" dirty="0">
-                <a:latin typeface="Arial MT"/>
-                <a:cs typeface="Arial MT"/>
-              </a:rPr>
-              <a:t> </a:t>
-            </a:r>
-            <a:r>
-              <a:rPr sz="1700" spc="-10" dirty="0">
+              <a:rPr spc="-35" dirty="0">
+                <a:latin typeface="Arial MT"/>
+                <a:cs typeface="Arial MT"/>
+              </a:rPr>
+              <a:t> </a:t>
+            </a:r>
+            <a:r>
+              <a:rPr spc="-10" dirty="0">
                 <a:latin typeface="Arial MT"/>
                 <a:cs typeface="Arial MT"/>
               </a:rPr>
               <a:t>precompiled </a:t>
             </a:r>
             <a:r>
-              <a:rPr sz="1700" dirty="0">
+              <a:rPr dirty="0">
                 <a:latin typeface="Arial MT"/>
                 <a:cs typeface="Arial MT"/>
               </a:rPr>
               <a:t>object</a:t>
             </a:r>
             <a:r>
-              <a:rPr sz="1700" spc="-80" dirty="0">
-                <a:latin typeface="Arial MT"/>
-                <a:cs typeface="Arial MT"/>
-              </a:rPr>
-              <a:t> </a:t>
-            </a:r>
-            <a:r>
-              <a:rPr sz="1700" spc="-10" dirty="0">
+              <a:rPr spc="-80" dirty="0">
+                <a:latin typeface="Arial MT"/>
+                <a:cs typeface="Arial MT"/>
+              </a:rPr>
+              <a:t> </a:t>
+            </a:r>
+            <a:r>
+              <a:rPr spc="-10" dirty="0">
                 <a:latin typeface="Arial MT"/>
                 <a:cs typeface="Arial MT"/>
               </a:rPr>
               <a:t>files</a:t>
             </a:r>
             <a:r>
-              <a:rPr lang="en-US" sz="1700" dirty="0">
-                <a:latin typeface="Arial MT"/>
-                <a:cs typeface="Arial MT"/>
-              </a:rPr>
-              <a:t> </a:t>
-            </a:r>
-            <a:r>
-              <a:rPr sz="1700" spc="-20" dirty="0">
+              <a:rPr lang="en-US" dirty="0">
+                <a:latin typeface="Arial MT"/>
+                <a:cs typeface="Arial MT"/>
+              </a:rPr>
+              <a:t> </a:t>
+            </a:r>
+            <a:r>
+              <a:rPr spc="-20" dirty="0">
                 <a:latin typeface="Arial MT"/>
                 <a:cs typeface="Arial MT"/>
               </a:rPr>
               <a:t>(</a:t>
             </a:r>
             <a:r>
-              <a:rPr sz="1700" b="1" spc="-20" dirty="0">
+              <a:rPr b="1" spc="-20" dirty="0">
                 <a:solidFill>
                   <a:srgbClr val="188037"/>
                 </a:solidFill>
@@ -44535,7 +45638,7 @@
               <a:t>.o</a:t>
             </a:r>
             <a:r>
-              <a:rPr sz="1700" spc="-550" dirty="0">
+              <a:rPr spc="-550" dirty="0">
                 <a:solidFill>
                   <a:srgbClr val="188037"/>
                 </a:solidFill>
@@ -44545,140 +45648,159 @@
               <a:t> </a:t>
             </a:r>
             <a:r>
-              <a:rPr sz="1700" dirty="0">
+              <a:rPr dirty="0">
                 <a:latin typeface="Arial MT"/>
                 <a:cs typeface="Arial MT"/>
               </a:rPr>
               <a:t>files)</a:t>
             </a:r>
             <a:r>
-              <a:rPr sz="1700" spc="-80" dirty="0">
-                <a:latin typeface="Arial MT"/>
-                <a:cs typeface="Arial MT"/>
-              </a:rPr>
-              <a:t> </a:t>
-            </a:r>
-            <a:r>
-              <a:rPr sz="1700" dirty="0">
+              <a:rPr spc="-80" dirty="0">
+                <a:latin typeface="Arial MT"/>
+                <a:cs typeface="Arial MT"/>
+              </a:rPr>
+              <a:t> </a:t>
+            </a:r>
+            <a:r>
+              <a:rPr dirty="0">
                 <a:latin typeface="Arial MT"/>
                 <a:cs typeface="Arial MT"/>
               </a:rPr>
               <a:t>bundled</a:t>
             </a:r>
             <a:r>
-              <a:rPr sz="1700" spc="-40" dirty="0">
-                <a:latin typeface="Arial MT"/>
-                <a:cs typeface="Arial MT"/>
-              </a:rPr>
-              <a:t> </a:t>
-            </a:r>
-            <a:r>
-              <a:rPr sz="1700" dirty="0">
+              <a:rPr spc="-40" dirty="0">
+                <a:latin typeface="Arial MT"/>
+                <a:cs typeface="Arial MT"/>
+              </a:rPr>
+              <a:t> </a:t>
+            </a:r>
+            <a:r>
+              <a:rPr dirty="0">
                 <a:latin typeface="Arial MT"/>
                 <a:cs typeface="Arial MT"/>
               </a:rPr>
               <a:t>together</a:t>
             </a:r>
             <a:r>
-              <a:rPr sz="1700" spc="-40" dirty="0">
-                <a:latin typeface="Arial MT"/>
-                <a:cs typeface="Arial MT"/>
-              </a:rPr>
-              <a:t> </a:t>
-            </a:r>
-            <a:r>
-              <a:rPr sz="1700" dirty="0">
+              <a:rPr spc="-40" dirty="0">
+                <a:latin typeface="Arial MT"/>
+                <a:cs typeface="Arial MT"/>
+              </a:rPr>
+              <a:t> </a:t>
+            </a:r>
+            <a:r>
+              <a:rPr dirty="0">
                 <a:latin typeface="Arial MT"/>
                 <a:cs typeface="Arial MT"/>
               </a:rPr>
               <a:t>into</a:t>
             </a:r>
             <a:r>
-              <a:rPr sz="1700" spc="-40" dirty="0">
-                <a:latin typeface="Arial MT"/>
-                <a:cs typeface="Arial MT"/>
-              </a:rPr>
-              <a:t> </a:t>
-            </a:r>
-            <a:r>
-              <a:rPr sz="1700" dirty="0">
+              <a:rPr spc="-40" dirty="0">
+                <a:latin typeface="Arial MT"/>
+                <a:cs typeface="Arial MT"/>
+              </a:rPr>
+              <a:t> </a:t>
+            </a:r>
+            <a:r>
+              <a:rPr dirty="0">
                 <a:latin typeface="Arial MT"/>
                 <a:cs typeface="Arial MT"/>
               </a:rPr>
               <a:t>a</a:t>
             </a:r>
             <a:r>
-              <a:rPr sz="1700" spc="-40" dirty="0">
-                <a:latin typeface="Arial MT"/>
-                <a:cs typeface="Arial MT"/>
-              </a:rPr>
-              <a:t> </a:t>
-            </a:r>
-            <a:r>
-              <a:rPr sz="1700" dirty="0">
+              <a:rPr spc="-40" dirty="0">
+                <a:latin typeface="Arial MT"/>
+                <a:cs typeface="Arial MT"/>
+              </a:rPr>
+              <a:t> </a:t>
+            </a:r>
+            <a:r>
+              <a:rPr dirty="0">
                 <a:latin typeface="Arial MT"/>
                 <a:cs typeface="Arial MT"/>
               </a:rPr>
               <a:t>single</a:t>
             </a:r>
             <a:r>
-              <a:rPr sz="1700" spc="-40" dirty="0">
-                <a:latin typeface="Arial MT"/>
-                <a:cs typeface="Arial MT"/>
-              </a:rPr>
-              <a:t> </a:t>
-            </a:r>
-            <a:r>
-              <a:rPr sz="1700" spc="-10" dirty="0">
+              <a:rPr spc="-40" dirty="0">
+                <a:latin typeface="Arial MT"/>
+                <a:cs typeface="Arial MT"/>
+              </a:rPr>
+              <a:t> </a:t>
+            </a:r>
+            <a:r>
+              <a:rPr spc="-10" dirty="0">
                 <a:latin typeface="Arial MT"/>
                 <a:cs typeface="Arial MT"/>
               </a:rPr>
               <a:t>archive </a:t>
             </a:r>
             <a:r>
-              <a:rPr sz="1700" dirty="0">
+              <a:rPr dirty="0">
                 <a:latin typeface="Arial MT"/>
                 <a:cs typeface="Arial MT"/>
               </a:rPr>
               <a:t>file</a:t>
             </a:r>
             <a:r>
-              <a:rPr sz="1700" spc="-95" dirty="0">
-                <a:latin typeface="Arial MT"/>
-                <a:cs typeface="Arial MT"/>
-              </a:rPr>
-              <a:t> </a:t>
-            </a:r>
-            <a:r>
-              <a:rPr sz="1700" dirty="0">
+              <a:rPr spc="-95" dirty="0">
+                <a:latin typeface="Arial MT"/>
+                <a:cs typeface="Arial MT"/>
+              </a:rPr>
+              <a:t> </a:t>
+            </a:r>
+            <a:r>
+              <a:rPr dirty="0">
                 <a:latin typeface="Arial MT"/>
                 <a:cs typeface="Arial MT"/>
               </a:rPr>
               <a:t>with</a:t>
             </a:r>
             <a:r>
-              <a:rPr sz="1700" spc="-50" dirty="0">
-                <a:latin typeface="Arial MT"/>
-                <a:cs typeface="Arial MT"/>
-              </a:rPr>
-              <a:t> </a:t>
-            </a:r>
-            <a:r>
-              <a:rPr sz="1700" dirty="0">
+              <a:rPr spc="-50" dirty="0">
+                <a:latin typeface="Arial MT"/>
+                <a:cs typeface="Arial MT"/>
+              </a:rPr>
+              <a:t> </a:t>
+            </a:r>
+            <a:r>
+              <a:rPr dirty="0">
                 <a:latin typeface="Arial MT"/>
                 <a:cs typeface="Arial MT"/>
               </a:rPr>
               <a:t>a</a:t>
             </a:r>
             <a:r>
-              <a:rPr sz="1700" spc="-40" dirty="0">
-                <a:latin typeface="Arial MT"/>
-                <a:cs typeface="Arial MT"/>
-              </a:rPr>
-              <a:t> </a:t>
-            </a:r>
-            <a:r>
-              <a:rPr sz="1700" b="1" spc="-20" dirty="0">
+              <a:rPr spc="-40" dirty="0">
+                <a:latin typeface="Arial MT"/>
+                <a:cs typeface="Arial MT"/>
+              </a:rPr>
+              <a:t> </a:t>
+            </a:r>
+            <a:endParaRPr lang="en-US" spc="-40" dirty="0">
+              <a:latin typeface="Arial MT"/>
+              <a:cs typeface="Arial MT"/>
+            </a:endParaRPr>
+          </a:p>
+          <a:p>
+            <a:pPr marL="298450" marR="264160" indent="-285750">
+              <a:lnSpc>
+                <a:spcPct val="114000"/>
+              </a:lnSpc>
+              <a:spcBef>
+                <a:spcPts val="100"/>
+              </a:spcBef>
+              <a:spcAft>
+                <a:spcPts val="600"/>
+              </a:spcAft>
+              <a:buFont typeface="Arial" panose="020B0604020202020204" pitchFamily="34" charset="0"/>
+              <a:buChar char="•"/>
+            </a:pPr>
+            <a:r>
+              <a:rPr b="1" spc="-20" dirty="0">
                 <a:solidFill>
                   <a:srgbClr val="188037"/>
                 </a:solidFill>
@@ -44688,7 +45810,7 @@
               <a:t>.a</a:t>
             </a:r>
             <a:r>
-              <a:rPr sz="1700" spc="-550" dirty="0">
+              <a:rPr spc="-550" dirty="0">
                 <a:solidFill>
                   <a:srgbClr val="188037"/>
                 </a:solidFill>
@@ -44698,76 +45820,79 @@
               <a:t> </a:t>
             </a:r>
             <a:r>
-              <a:rPr sz="1700" dirty="0">
+              <a:rPr dirty="0">
                 <a:latin typeface="Arial MT"/>
                 <a:cs typeface="Arial MT"/>
               </a:rPr>
               <a:t>extension</a:t>
             </a:r>
             <a:r>
-              <a:rPr sz="1700" spc="-50" dirty="0">
-                <a:latin typeface="Arial MT"/>
-                <a:cs typeface="Arial MT"/>
-              </a:rPr>
-              <a:t> </a:t>
-            </a:r>
-            <a:br>
-              <a:rPr lang="en-US" sz="1700" spc="-50" dirty="0">
-                <a:latin typeface="Arial MT"/>
-                <a:cs typeface="Arial MT"/>
-              </a:rPr>
-            </a:br>
-            <a:r>
-              <a:rPr sz="1700" dirty="0">
+              <a:rPr spc="-50" dirty="0">
+                <a:latin typeface="Arial MT"/>
+                <a:cs typeface="Arial MT"/>
+              </a:rPr>
+              <a:t> </a:t>
+            </a:r>
+            <a:r>
+              <a:rPr dirty="0">
                 <a:latin typeface="Arial MT"/>
                 <a:cs typeface="Arial MT"/>
               </a:rPr>
               <a:t>(on</a:t>
             </a:r>
             <a:r>
-              <a:rPr sz="1700" spc="-50" dirty="0">
-                <a:latin typeface="Arial MT"/>
-                <a:cs typeface="Arial MT"/>
-              </a:rPr>
-              <a:t> </a:t>
-            </a:r>
-            <a:r>
-              <a:rPr sz="1700" dirty="0">
+              <a:rPr spc="-50" dirty="0">
+                <a:latin typeface="Arial MT"/>
+                <a:cs typeface="Arial MT"/>
+              </a:rPr>
+              <a:t> </a:t>
+            </a:r>
+            <a:r>
+              <a:rPr dirty="0">
                 <a:latin typeface="Arial MT"/>
                 <a:cs typeface="Arial MT"/>
               </a:rPr>
               <a:t>Unix/Linux</a:t>
             </a:r>
             <a:r>
-              <a:rPr sz="1700" spc="-45" dirty="0">
-                <a:latin typeface="Arial MT"/>
-                <a:cs typeface="Arial MT"/>
-              </a:rPr>
-              <a:t> </a:t>
-            </a:r>
-            <a:r>
-              <a:rPr sz="1700" spc="-10" dirty="0">
+              <a:rPr spc="-45" dirty="0">
+                <a:latin typeface="Arial MT"/>
+                <a:cs typeface="Arial MT"/>
+              </a:rPr>
+              <a:t> </a:t>
+            </a:r>
+            <a:r>
+              <a:rPr spc="-10" dirty="0">
                 <a:latin typeface="Arial MT"/>
                 <a:cs typeface="Arial MT"/>
               </a:rPr>
               <a:t>systems) </a:t>
             </a:r>
             <a:r>
-              <a:rPr sz="1700" dirty="0">
+              <a:rPr dirty="0">
                 <a:latin typeface="Arial MT"/>
                 <a:cs typeface="Arial MT"/>
               </a:rPr>
               <a:t>or</a:t>
             </a:r>
-            <a:r>
-              <a:rPr sz="1700" spc="-75" dirty="0">
-                <a:latin typeface="Arial MT"/>
-                <a:cs typeface="Arial MT"/>
-              </a:rPr>
-              <a:t> </a:t>
-            </a:r>
-            <a:r>
-              <a:rPr sz="1700" b="1" spc="-20" dirty="0">
+            <a:endParaRPr lang="en-US" spc="-75" dirty="0">
+              <a:latin typeface="Arial MT"/>
+              <a:cs typeface="Arial MT"/>
+            </a:endParaRPr>
+          </a:p>
+          <a:p>
+            <a:pPr marL="298450" marR="264160" indent="-285750">
+              <a:lnSpc>
+                <a:spcPct val="114000"/>
+              </a:lnSpc>
+              <a:spcBef>
+                <a:spcPts val="100"/>
+              </a:spcBef>
+              <a:buFont typeface="Arial" panose="020B0604020202020204" pitchFamily="34" charset="0"/>
+              <a:buChar char="•"/>
+            </a:pPr>
+            <a:r>
+              <a:rPr b="1" spc="-20" dirty="0">
                 <a:solidFill>
                   <a:srgbClr val="188037"/>
                 </a:solidFill>
@@ -44777,7 +45902,7 @@
               <a:t>.lib</a:t>
             </a:r>
             <a:r>
-              <a:rPr sz="1700" spc="-555" dirty="0">
+              <a:rPr spc="-555" dirty="0">
                 <a:solidFill>
                   <a:srgbClr val="188037"/>
                 </a:solidFill>
@@ -44787,41 +45912,41 @@
               <a:t> </a:t>
             </a:r>
             <a:r>
-              <a:rPr sz="1700" dirty="0">
+              <a:rPr dirty="0">
                 <a:latin typeface="Arial MT"/>
                 <a:cs typeface="Arial MT"/>
               </a:rPr>
               <a:t>extension</a:t>
             </a:r>
             <a:r>
-              <a:rPr sz="1700" spc="-40" dirty="0">
-                <a:latin typeface="Arial MT"/>
-                <a:cs typeface="Arial MT"/>
-              </a:rPr>
-              <a:t> </a:t>
-            </a:r>
-            <a:r>
-              <a:rPr sz="1700" dirty="0">
+              <a:rPr spc="-40" dirty="0">
+                <a:latin typeface="Arial MT"/>
+                <a:cs typeface="Arial MT"/>
+              </a:rPr>
+              <a:t> </a:t>
+            </a:r>
+            <a:r>
+              <a:rPr dirty="0">
                 <a:latin typeface="Arial MT"/>
                 <a:cs typeface="Arial MT"/>
               </a:rPr>
               <a:t>(on</a:t>
             </a:r>
             <a:r>
-              <a:rPr sz="1700" spc="-40" dirty="0">
-                <a:latin typeface="Arial MT"/>
-                <a:cs typeface="Arial MT"/>
-              </a:rPr>
-              <a:t> </a:t>
-            </a:r>
-            <a:r>
-              <a:rPr sz="1700" spc="-10" dirty="0">
+              <a:rPr spc="-40" dirty="0">
+                <a:latin typeface="Arial MT"/>
+                <a:cs typeface="Arial MT"/>
+              </a:rPr>
+              <a:t> </a:t>
+            </a:r>
+            <a:r>
+              <a:rPr spc="-10" dirty="0">
                 <a:latin typeface="Arial MT"/>
                 <a:cs typeface="Arial MT"/>
               </a:rPr>
               <a:t>Windows).</a:t>
             </a:r>
-            <a:endParaRPr sz="1700" dirty="0">
+            <a:endParaRPr dirty="0">
               <a:latin typeface="Arial MT"/>
               <a:cs typeface="Arial MT"/>
             </a:endParaRPr>
@@ -46121,7 +47246,7 @@
         <p:spPr>
           <a:xfrm>
             <a:off x="576000" y="5303331"/>
-            <a:ext cx="4410710" cy="299720"/>
+            <a:ext cx="6399664" cy="289823"/>
           </a:xfrm>
           <a:prstGeom prst="rect">
             <a:avLst/>
@@ -46244,8 +47369,8 @@
         </p:nvSpPr>
         <p:spPr>
           <a:xfrm>
-            <a:off x="594550" y="5842090"/>
-            <a:ext cx="5272850" cy="628377"/>
+            <a:off x="605402" y="5824278"/>
+            <a:ext cx="6100197" cy="685252"/>
           </a:xfrm>
           <a:prstGeom prst="rect">
             <a:avLst/>
@@ -46259,7 +47384,7 @@
           <a:p>
             <a:pPr marR="5080">
               <a:lnSpc>
-                <a:spcPct val="100000"/>
+                <a:spcPct val="114000"/>
               </a:lnSpc>
               <a:spcBef>
                 <a:spcPts val="100"/>
@@ -46362,7 +47487,7 @@
                 <a:latin typeface="Arial"/>
                 <a:cs typeface="Arial"/>
               </a:rPr>
-              <a:t>	#linux</a:t>
+              <a:t>	#linux (dynamic libraries)</a:t>
             </a:r>
             <a:endParaRPr sz="2000" dirty="0">
               <a:latin typeface="Arial"/>
@@ -47695,7 +48820,7 @@
               <a:t> </a:t>
             </a:r>
             <a:r>
-              <a:rPr sz="1600" b="1" spc="-20" dirty="0">
+              <a:rPr sz="1600" b="1" spc="-20" dirty="0" err="1">
                 <a:latin typeface="Courier New"/>
                 <a:cs typeface="Courier New"/>
               </a:rPr>
@@ -47715,22 +48840,14 @@
               </a:rPr>
               <a:t>and</a:t>
             </a:r>
-            <a:endParaRPr sz="1600" dirty="0">
-              <a:latin typeface="Arial MT"/>
-              <a:cs typeface="Arial MT"/>
-            </a:endParaRPr>
-          </a:p>
-          <a:p>
-            <a:pPr marL="542925">
-              <a:lnSpc>
-                <a:spcPct val="114000"/>
-              </a:lnSpc>
-              <a:spcBef>
-                <a:spcPts val="285"/>
-              </a:spcBef>
-            </a:pPr>
-            <a:r>
-              <a:rPr sz="1600" b="1" spc="-20" dirty="0">
+            <a:br>
+              <a:rPr lang="en-US" sz="1600" dirty="0">
+                <a:latin typeface="Arial MT"/>
+                <a:cs typeface="Arial MT"/>
+              </a:rPr>
+            </a:br>
+            <a:r>
+              <a:rPr sz="1600" b="1" spc="-20" dirty="0" err="1">
                 <a:latin typeface="Courier New"/>
                 <a:cs typeface="Courier New"/>
               </a:rPr>
@@ -48348,7 +49465,7 @@
               <a:t>contains </a:t>
             </a:r>
             <a:r>
-              <a:rPr sz="1600" dirty="0">
+              <a:rPr sz="1600" b="1" dirty="0">
                 <a:latin typeface="Arial MT"/>
                 <a:cs typeface="Arial MT"/>
               </a:rPr>
